--- a/ietf125-Shenzhen/slides/chair-slides-bmwg-ippm.pptx
+++ b/ietf125-Shenzhen/slides/chair-slides-bmwg-ippm.pptx
@@ -7,7 +7,7 @@
     <p:sldMasterId id="2147483666" r:id="rId6"/>
   </p:sldMasterIdLst>
   <p:notesMasterIdLst>
-    <p:notesMasterId r:id="rId21"/>
+    <p:notesMasterId r:id="rId22"/>
   </p:notesMasterIdLst>
   <p:sldIdLst>
     <p:sldId id="256" r:id="rId7"/>
@@ -22,51 +22,52 @@
     <p:sldId id="264" r:id="rId16"/>
     <p:sldId id="271" r:id="rId17"/>
     <p:sldId id="266" r:id="rId18"/>
-    <p:sldId id="269" r:id="rId19"/>
-    <p:sldId id="260" r:id="rId20"/>
+    <p:sldId id="273" r:id="rId19"/>
+    <p:sldId id="269" r:id="rId20"/>
+    <p:sldId id="260" r:id="rId21"/>
   </p:sldIdLst>
   <p:sldSz cx="9144000" cy="5143500" type="screen16x9"/>
   <p:notesSz cx="6858000" cy="9144000"/>
   <p:embeddedFontLst>
     <p:embeddedFont>
       <p:font typeface="Inter" panose="020B0604020202020204" charset="0"/>
-      <p:regular r:id="rId22"/>
-      <p:bold r:id="rId23"/>
-      <p:italic r:id="rId24"/>
-      <p:boldItalic r:id="rId25"/>
+      <p:regular r:id="rId23"/>
+      <p:bold r:id="rId24"/>
+      <p:italic r:id="rId25"/>
+      <p:boldItalic r:id="rId26"/>
     </p:embeddedFont>
     <p:embeddedFont>
       <p:font typeface="Montserrat" panose="00000500000000000000" pitchFamily="2" charset="0"/>
-      <p:regular r:id="rId26"/>
-      <p:bold r:id="rId27"/>
-      <p:italic r:id="rId28"/>
-      <p:boldItalic r:id="rId29"/>
+      <p:regular r:id="rId27"/>
+      <p:bold r:id="rId28"/>
+      <p:italic r:id="rId29"/>
+      <p:boldItalic r:id="rId30"/>
     </p:embeddedFont>
     <p:embeddedFont>
       <p:font typeface="Open Sans" panose="020B0606030504020204" pitchFamily="34" charset="0"/>
-      <p:regular r:id="rId30"/>
-      <p:bold r:id="rId31"/>
-      <p:italic r:id="rId32"/>
-      <p:boldItalic r:id="rId33"/>
+      <p:regular r:id="rId31"/>
+      <p:bold r:id="rId32"/>
+      <p:italic r:id="rId33"/>
+      <p:boldItalic r:id="rId34"/>
     </p:embeddedFont>
     <p:embeddedFont>
       <p:font typeface="Open Sans Medium" panose="020B0604020202020204" charset="0"/>
-      <p:regular r:id="rId34"/>
-      <p:bold r:id="rId35"/>
-      <p:italic r:id="rId36"/>
-      <p:boldItalic r:id="rId37"/>
+      <p:regular r:id="rId35"/>
+      <p:bold r:id="rId36"/>
+      <p:italic r:id="rId37"/>
+      <p:boldItalic r:id="rId38"/>
     </p:embeddedFont>
     <p:embeddedFont>
       <p:font typeface="Open Sans SemiBold" panose="020B0706030804020204" pitchFamily="34" charset="0"/>
-      <p:bold r:id="rId38"/>
-      <p:boldItalic r:id="rId39"/>
+      <p:bold r:id="rId39"/>
+      <p:boldItalic r:id="rId40"/>
     </p:embeddedFont>
     <p:embeddedFont>
       <p:font typeface="Roboto" panose="02000000000000000000" pitchFamily="2" charset="0"/>
-      <p:regular r:id="rId40"/>
-      <p:bold r:id="rId41"/>
-      <p:italic r:id="rId42"/>
-      <p:boldItalic r:id="rId43"/>
+      <p:regular r:id="rId41"/>
+      <p:bold r:id="rId42"/>
+      <p:italic r:id="rId43"/>
+      <p:boldItalic r:id="rId44"/>
     </p:embeddedFont>
   </p:embeddedFontLst>
   <p:defaultTextStyle>
@@ -328,29 +329,6 @@
 <file path=ppt/changesInfos/changesInfo1.xml><?xml version="1.0" encoding="utf-8"?>
 <pc:chgInfo xmlns:a="http://schemas.openxmlformats.org/drawingml/2006/main" xmlns:r="http://schemas.openxmlformats.org/officeDocument/2006/relationships" xmlns:ac="http://schemas.microsoft.com/office/drawing/2013/main/command" xmlns:pc="http://schemas.microsoft.com/office/powerpoint/2013/main/command">
   <pc:docChgLst>
-    <pc:chgData name="Graf Thomas, SCS-INI-NET-VNC-E2E" userId="487bc3e3-9ce7-4cdd-b7b4-8899ea88d289" providerId="ADAL" clId="{52F89B06-B397-4BA4-9DB6-8A81C30956C2}"/>
-    <pc:docChg chg="addSld delSld modSld">
-      <pc:chgData name="Graf Thomas, SCS-INI-NET-VNC-E2E" userId="487bc3e3-9ce7-4cdd-b7b4-8899ea88d289" providerId="ADAL" clId="{52F89B06-B397-4BA4-9DB6-8A81C30956C2}" dt="2025-11-04T14:39:54.897" v="2" actId="47"/>
-      <pc:docMkLst>
-        <pc:docMk/>
-      </pc:docMkLst>
-      <pc:sldChg chg="del">
-        <pc:chgData name="Graf Thomas, SCS-INI-NET-VNC-E2E" userId="487bc3e3-9ce7-4cdd-b7b4-8899ea88d289" providerId="ADAL" clId="{52F89B06-B397-4BA4-9DB6-8A81C30956C2}" dt="2025-11-04T14:39:54.897" v="2" actId="47"/>
-        <pc:sldMkLst>
-          <pc:docMk/>
-          <pc:sldMk cId="0" sldId="257"/>
-        </pc:sldMkLst>
-      </pc:sldChg>
-      <pc:sldChg chg="add del">
-        <pc:chgData name="Graf Thomas, SCS-INI-NET-VNC-E2E" userId="487bc3e3-9ce7-4cdd-b7b4-8899ea88d289" providerId="ADAL" clId="{52F89B06-B397-4BA4-9DB6-8A81C30956C2}" dt="2025-11-04T14:39:38.974" v="1"/>
-        <pc:sldMkLst>
-          <pc:docMk/>
-          <pc:sldMk cId="0" sldId="272"/>
-        </pc:sldMkLst>
-      </pc:sldChg>
-    </pc:docChg>
-  </pc:docChgLst>
-  <pc:docChgLst>
     <pc:chgData name="Marcus Ihlar" userId="3466507a-8f95-47f2-ae1b-ce7d6ca611a4" providerId="ADAL" clId="{AED546ED-D998-4FD7-8756-673BE2DDCF49}"/>
     <pc:docChg chg="modSld">
       <pc:chgData name="Marcus Ihlar" userId="3466507a-8f95-47f2-ae1b-ce7d6ca611a4" providerId="ADAL" clId="{AED546ED-D998-4FD7-8756-673BE2DDCF49}" dt="2025-07-16T10:35:22.434" v="10" actId="20577"/>
@@ -369,99 +347,6 @@
         <pc:sldMkLst>
           <pc:docMk/>
           <pc:sldMk cId="2128497270" sldId="269"/>
-        </pc:sldMkLst>
-      </pc:sldChg>
-    </pc:docChg>
-  </pc:docChgLst>
-  <pc:docChgLst>
-    <pc:chgData name="Graf Thomas, SCS-INI-NET-VNC-E2E" userId="487bc3e3-9ce7-4cdd-b7b4-8899ea88d289" providerId="ADAL" clId="{4403439A-50EC-49D8-B7F6-3D7264685FDE}"/>
-    <pc:docChg chg="undo custSel addSld modSld sldOrd">
-      <pc:chgData name="Graf Thomas, SCS-INI-NET-VNC-E2E" userId="487bc3e3-9ce7-4cdd-b7b4-8899ea88d289" providerId="ADAL" clId="{4403439A-50EC-49D8-B7F6-3D7264685FDE}" dt="2025-07-21T05:25:01.641" v="1423" actId="1076"/>
-      <pc:docMkLst>
-        <pc:docMk/>
-      </pc:docMkLst>
-      <pc:sldChg chg="modSp mod">
-        <pc:chgData name="Graf Thomas, SCS-INI-NET-VNC-E2E" userId="487bc3e3-9ce7-4cdd-b7b4-8899ea88d289" providerId="ADAL" clId="{4403439A-50EC-49D8-B7F6-3D7264685FDE}" dt="2025-07-10T05:43:59.555" v="6" actId="20577"/>
-        <pc:sldMkLst>
-          <pc:docMk/>
-          <pc:sldMk cId="0" sldId="256"/>
-        </pc:sldMkLst>
-      </pc:sldChg>
-      <pc:sldChg chg="ord">
-        <pc:chgData name="Graf Thomas, SCS-INI-NET-VNC-E2E" userId="487bc3e3-9ce7-4cdd-b7b4-8899ea88d289" providerId="ADAL" clId="{4403439A-50EC-49D8-B7F6-3D7264685FDE}" dt="2025-07-10T06:22:20.341" v="686"/>
-        <pc:sldMkLst>
-          <pc:docMk/>
-          <pc:sldMk cId="0" sldId="259"/>
-        </pc:sldMkLst>
-      </pc:sldChg>
-      <pc:sldChg chg="modSp mod">
-        <pc:chgData name="Graf Thomas, SCS-INI-NET-VNC-E2E" userId="487bc3e3-9ce7-4cdd-b7b4-8899ea88d289" providerId="ADAL" clId="{4403439A-50EC-49D8-B7F6-3D7264685FDE}" dt="2025-07-10T05:48:14.572" v="76" actId="20577"/>
-        <pc:sldMkLst>
-          <pc:docMk/>
-          <pc:sldMk cId="0" sldId="260"/>
-        </pc:sldMkLst>
-      </pc:sldChg>
-      <pc:sldChg chg="modSp mod">
-        <pc:chgData name="Graf Thomas, SCS-INI-NET-VNC-E2E" userId="487bc3e3-9ce7-4cdd-b7b4-8899ea88d289" providerId="ADAL" clId="{4403439A-50EC-49D8-B7F6-3D7264685FDE}" dt="2025-07-10T05:44:34.935" v="15" actId="20577"/>
-        <pc:sldMkLst>
-          <pc:docMk/>
-          <pc:sldMk cId="3471097262" sldId="261"/>
-        </pc:sldMkLst>
-      </pc:sldChg>
-      <pc:sldChg chg="addSp delSp modSp mod">
-        <pc:chgData name="Graf Thomas, SCS-INI-NET-VNC-E2E" userId="487bc3e3-9ce7-4cdd-b7b4-8899ea88d289" providerId="ADAL" clId="{4403439A-50EC-49D8-B7F6-3D7264685FDE}" dt="2025-07-21T05:25:01.641" v="1423" actId="1076"/>
-        <pc:sldMkLst>
-          <pc:docMk/>
-          <pc:sldMk cId="2332748115" sldId="263"/>
-        </pc:sldMkLst>
-      </pc:sldChg>
-      <pc:sldChg chg="addSp delSp modSp mod">
-        <pc:chgData name="Graf Thomas, SCS-INI-NET-VNC-E2E" userId="487bc3e3-9ce7-4cdd-b7b4-8899ea88d289" providerId="ADAL" clId="{4403439A-50EC-49D8-B7F6-3D7264685FDE}" dt="2025-07-14T15:38:27.636" v="757" actId="1076"/>
-        <pc:sldMkLst>
-          <pc:docMk/>
-          <pc:sldMk cId="703495152" sldId="264"/>
-        </pc:sldMkLst>
-      </pc:sldChg>
-      <pc:sldChg chg="modSp mod">
-        <pc:chgData name="Graf Thomas, SCS-INI-NET-VNC-E2E" userId="487bc3e3-9ce7-4cdd-b7b4-8899ea88d289" providerId="ADAL" clId="{4403439A-50EC-49D8-B7F6-3D7264685FDE}" dt="2025-07-10T06:06:38.835" v="223" actId="14100"/>
-        <pc:sldMkLst>
-          <pc:docMk/>
-          <pc:sldMk cId="1372742302" sldId="266"/>
-        </pc:sldMkLst>
-      </pc:sldChg>
-      <pc:sldChg chg="modSp add mod">
-        <pc:chgData name="Graf Thomas, SCS-INI-NET-VNC-E2E" userId="487bc3e3-9ce7-4cdd-b7b4-8899ea88d289" providerId="ADAL" clId="{4403439A-50EC-49D8-B7F6-3D7264685FDE}" dt="2025-07-10T06:00:40.529" v="209" actId="20577"/>
-        <pc:sldMkLst>
-          <pc:docMk/>
-          <pc:sldMk cId="1383312952" sldId="267"/>
-        </pc:sldMkLst>
-      </pc:sldChg>
-      <pc:sldChg chg="modSp add mod ord">
-        <pc:chgData name="Graf Thomas, SCS-INI-NET-VNC-E2E" userId="487bc3e3-9ce7-4cdd-b7b4-8899ea88d289" providerId="ADAL" clId="{4403439A-50EC-49D8-B7F6-3D7264685FDE}" dt="2025-07-10T06:00:34.413" v="207" actId="20577"/>
-        <pc:sldMkLst>
-          <pc:docMk/>
-          <pc:sldMk cId="1659843495" sldId="268"/>
-        </pc:sldMkLst>
-      </pc:sldChg>
-      <pc:sldChg chg="modSp add mod">
-        <pc:chgData name="Graf Thomas, SCS-INI-NET-VNC-E2E" userId="487bc3e3-9ce7-4cdd-b7b4-8899ea88d289" providerId="ADAL" clId="{4403439A-50EC-49D8-B7F6-3D7264685FDE}" dt="2025-07-10T06:19:40.757" v="684" actId="20577"/>
-        <pc:sldMkLst>
-          <pc:docMk/>
-          <pc:sldMk cId="2128497270" sldId="269"/>
-        </pc:sldMkLst>
-      </pc:sldChg>
-      <pc:sldChg chg="modSp add mod ord">
-        <pc:chgData name="Graf Thomas, SCS-INI-NET-VNC-E2E" userId="487bc3e3-9ce7-4cdd-b7b4-8899ea88d289" providerId="ADAL" clId="{4403439A-50EC-49D8-B7F6-3D7264685FDE}" dt="2025-07-15T09:01:50.650" v="1407" actId="20577"/>
-        <pc:sldMkLst>
-          <pc:docMk/>
-          <pc:sldMk cId="2434865477" sldId="270"/>
-        </pc:sldMkLst>
-      </pc:sldChg>
-      <pc:sldChg chg="addSp delSp modSp add mod">
-        <pc:chgData name="Graf Thomas, SCS-INI-NET-VNC-E2E" userId="487bc3e3-9ce7-4cdd-b7b4-8899ea88d289" providerId="ADAL" clId="{4403439A-50EC-49D8-B7F6-3D7264685FDE}" dt="2025-07-14T15:38:57.390" v="780" actId="1076"/>
-        <pc:sldMkLst>
-          <pc:docMk/>
-          <pc:sldMk cId="1859012803" sldId="271"/>
         </pc:sldMkLst>
       </pc:sldChg>
     </pc:docChg>
@@ -803,6 +688,122 @@
       </pc:sldChg>
     </pc:docChg>
   </pc:docChgLst>
+  <pc:docChgLst>
+    <pc:chgData name="Graf Thomas, SCS-INI-NET-VNC-E2E" userId="487bc3e3-9ce7-4cdd-b7b4-8899ea88d289" providerId="ADAL" clId="{52F89B06-B397-4BA4-9DB6-8A81C30956C2}"/>
+    <pc:docChg chg="addSld delSld modSld">
+      <pc:chgData name="Graf Thomas, SCS-INI-NET-VNC-E2E" userId="487bc3e3-9ce7-4cdd-b7b4-8899ea88d289" providerId="ADAL" clId="{52F89B06-B397-4BA4-9DB6-8A81C30956C2}" dt="2025-11-04T14:39:54.897" v="2" actId="47"/>
+      <pc:docMkLst>
+        <pc:docMk/>
+      </pc:docMkLst>
+      <pc:sldChg chg="del">
+        <pc:chgData name="Graf Thomas, SCS-INI-NET-VNC-E2E" userId="487bc3e3-9ce7-4cdd-b7b4-8899ea88d289" providerId="ADAL" clId="{52F89B06-B397-4BA4-9DB6-8A81C30956C2}" dt="2025-11-04T14:39:54.897" v="2" actId="47"/>
+        <pc:sldMkLst>
+          <pc:docMk/>
+          <pc:sldMk cId="0" sldId="257"/>
+        </pc:sldMkLst>
+      </pc:sldChg>
+      <pc:sldChg chg="add del">
+        <pc:chgData name="Graf Thomas, SCS-INI-NET-VNC-E2E" userId="487bc3e3-9ce7-4cdd-b7b4-8899ea88d289" providerId="ADAL" clId="{52F89B06-B397-4BA4-9DB6-8A81C30956C2}" dt="2025-11-04T14:39:38.974" v="1"/>
+        <pc:sldMkLst>
+          <pc:docMk/>
+          <pc:sldMk cId="0" sldId="272"/>
+        </pc:sldMkLst>
+      </pc:sldChg>
+    </pc:docChg>
+  </pc:docChgLst>
+  <pc:docChgLst>
+    <pc:chgData name="Graf Thomas, SCS-INI-NET-VNC-E2E" userId="487bc3e3-9ce7-4cdd-b7b4-8899ea88d289" providerId="ADAL" clId="{4403439A-50EC-49D8-B7F6-3D7264685FDE}"/>
+    <pc:docChg chg="undo custSel addSld modSld sldOrd">
+      <pc:chgData name="Graf Thomas, SCS-INI-NET-VNC-E2E" userId="487bc3e3-9ce7-4cdd-b7b4-8899ea88d289" providerId="ADAL" clId="{4403439A-50EC-49D8-B7F6-3D7264685FDE}" dt="2025-07-21T05:25:01.641" v="1423" actId="1076"/>
+      <pc:docMkLst>
+        <pc:docMk/>
+      </pc:docMkLst>
+      <pc:sldChg chg="modSp mod">
+        <pc:chgData name="Graf Thomas, SCS-INI-NET-VNC-E2E" userId="487bc3e3-9ce7-4cdd-b7b4-8899ea88d289" providerId="ADAL" clId="{4403439A-50EC-49D8-B7F6-3D7264685FDE}" dt="2025-07-10T05:43:59.555" v="6" actId="20577"/>
+        <pc:sldMkLst>
+          <pc:docMk/>
+          <pc:sldMk cId="0" sldId="256"/>
+        </pc:sldMkLst>
+      </pc:sldChg>
+      <pc:sldChg chg="ord">
+        <pc:chgData name="Graf Thomas, SCS-INI-NET-VNC-E2E" userId="487bc3e3-9ce7-4cdd-b7b4-8899ea88d289" providerId="ADAL" clId="{4403439A-50EC-49D8-B7F6-3D7264685FDE}" dt="2025-07-10T06:22:20.341" v="686"/>
+        <pc:sldMkLst>
+          <pc:docMk/>
+          <pc:sldMk cId="0" sldId="259"/>
+        </pc:sldMkLst>
+      </pc:sldChg>
+      <pc:sldChg chg="modSp mod">
+        <pc:chgData name="Graf Thomas, SCS-INI-NET-VNC-E2E" userId="487bc3e3-9ce7-4cdd-b7b4-8899ea88d289" providerId="ADAL" clId="{4403439A-50EC-49D8-B7F6-3D7264685FDE}" dt="2025-07-10T05:48:14.572" v="76" actId="20577"/>
+        <pc:sldMkLst>
+          <pc:docMk/>
+          <pc:sldMk cId="0" sldId="260"/>
+        </pc:sldMkLst>
+      </pc:sldChg>
+      <pc:sldChg chg="modSp mod">
+        <pc:chgData name="Graf Thomas, SCS-INI-NET-VNC-E2E" userId="487bc3e3-9ce7-4cdd-b7b4-8899ea88d289" providerId="ADAL" clId="{4403439A-50EC-49D8-B7F6-3D7264685FDE}" dt="2025-07-10T05:44:34.935" v="15" actId="20577"/>
+        <pc:sldMkLst>
+          <pc:docMk/>
+          <pc:sldMk cId="3471097262" sldId="261"/>
+        </pc:sldMkLst>
+      </pc:sldChg>
+      <pc:sldChg chg="addSp delSp modSp mod">
+        <pc:chgData name="Graf Thomas, SCS-INI-NET-VNC-E2E" userId="487bc3e3-9ce7-4cdd-b7b4-8899ea88d289" providerId="ADAL" clId="{4403439A-50EC-49D8-B7F6-3D7264685FDE}" dt="2025-07-21T05:25:01.641" v="1423" actId="1076"/>
+        <pc:sldMkLst>
+          <pc:docMk/>
+          <pc:sldMk cId="2332748115" sldId="263"/>
+        </pc:sldMkLst>
+      </pc:sldChg>
+      <pc:sldChg chg="addSp delSp modSp mod">
+        <pc:chgData name="Graf Thomas, SCS-INI-NET-VNC-E2E" userId="487bc3e3-9ce7-4cdd-b7b4-8899ea88d289" providerId="ADAL" clId="{4403439A-50EC-49D8-B7F6-3D7264685FDE}" dt="2025-07-14T15:38:27.636" v="757" actId="1076"/>
+        <pc:sldMkLst>
+          <pc:docMk/>
+          <pc:sldMk cId="703495152" sldId="264"/>
+        </pc:sldMkLst>
+      </pc:sldChg>
+      <pc:sldChg chg="modSp mod">
+        <pc:chgData name="Graf Thomas, SCS-INI-NET-VNC-E2E" userId="487bc3e3-9ce7-4cdd-b7b4-8899ea88d289" providerId="ADAL" clId="{4403439A-50EC-49D8-B7F6-3D7264685FDE}" dt="2025-07-10T06:06:38.835" v="223" actId="14100"/>
+        <pc:sldMkLst>
+          <pc:docMk/>
+          <pc:sldMk cId="1372742302" sldId="266"/>
+        </pc:sldMkLst>
+      </pc:sldChg>
+      <pc:sldChg chg="modSp add mod">
+        <pc:chgData name="Graf Thomas, SCS-INI-NET-VNC-E2E" userId="487bc3e3-9ce7-4cdd-b7b4-8899ea88d289" providerId="ADAL" clId="{4403439A-50EC-49D8-B7F6-3D7264685FDE}" dt="2025-07-10T06:00:40.529" v="209" actId="20577"/>
+        <pc:sldMkLst>
+          <pc:docMk/>
+          <pc:sldMk cId="1383312952" sldId="267"/>
+        </pc:sldMkLst>
+      </pc:sldChg>
+      <pc:sldChg chg="modSp add mod ord">
+        <pc:chgData name="Graf Thomas, SCS-INI-NET-VNC-E2E" userId="487bc3e3-9ce7-4cdd-b7b4-8899ea88d289" providerId="ADAL" clId="{4403439A-50EC-49D8-B7F6-3D7264685FDE}" dt="2025-07-10T06:00:34.413" v="207" actId="20577"/>
+        <pc:sldMkLst>
+          <pc:docMk/>
+          <pc:sldMk cId="1659843495" sldId="268"/>
+        </pc:sldMkLst>
+      </pc:sldChg>
+      <pc:sldChg chg="modSp add mod">
+        <pc:chgData name="Graf Thomas, SCS-INI-NET-VNC-E2E" userId="487bc3e3-9ce7-4cdd-b7b4-8899ea88d289" providerId="ADAL" clId="{4403439A-50EC-49D8-B7F6-3D7264685FDE}" dt="2025-07-10T06:19:40.757" v="684" actId="20577"/>
+        <pc:sldMkLst>
+          <pc:docMk/>
+          <pc:sldMk cId="2128497270" sldId="269"/>
+        </pc:sldMkLst>
+      </pc:sldChg>
+      <pc:sldChg chg="modSp add mod ord">
+        <pc:chgData name="Graf Thomas, SCS-INI-NET-VNC-E2E" userId="487bc3e3-9ce7-4cdd-b7b4-8899ea88d289" providerId="ADAL" clId="{4403439A-50EC-49D8-B7F6-3D7264685FDE}" dt="2025-07-15T09:01:50.650" v="1407" actId="20577"/>
+        <pc:sldMkLst>
+          <pc:docMk/>
+          <pc:sldMk cId="2434865477" sldId="270"/>
+        </pc:sldMkLst>
+      </pc:sldChg>
+      <pc:sldChg chg="addSp delSp modSp add mod">
+        <pc:chgData name="Graf Thomas, SCS-INI-NET-VNC-E2E" userId="487bc3e3-9ce7-4cdd-b7b4-8899ea88d289" providerId="ADAL" clId="{4403439A-50EC-49D8-B7F6-3D7264685FDE}" dt="2025-07-14T15:38:57.390" v="780" actId="1076"/>
+        <pc:sldMkLst>
+          <pc:docMk/>
+          <pc:sldMk cId="1859012803" sldId="271"/>
+        </pc:sldMkLst>
+      </pc:sldChg>
+    </pc:docChg>
+  </pc:docChgLst>
 </pc:chgInfo>
 </file>
 
@@ -1589,6 +1590,72 @@
     </p:spTree>
     <p:extLst>
       <p:ext uri="{BB962C8B-B14F-4D97-AF65-F5344CB8AC3E}">
+        <p14:creationId xmlns:p14="http://schemas.microsoft.com/office/powerpoint/2010/main" val="234543055"/>
+      </p:ext>
+    </p:extLst>
+  </p:cSld>
+  <p:clrMapOvr>
+    <a:masterClrMapping/>
+  </p:clrMapOvr>
+</p:notes>
+</file>
+
+<file path=ppt/notesSlides/notesSlide13.xml><?xml version="1.0" encoding="utf-8"?>
+<p:notes xmlns:a="http://schemas.openxmlformats.org/drawingml/2006/main" xmlns:r="http://schemas.openxmlformats.org/officeDocument/2006/relationships" xmlns:p="http://schemas.openxmlformats.org/presentationml/2006/main">
+  <p:cSld>
+    <p:spTree>
+      <p:nvGrpSpPr>
+        <p:cNvPr id="1" name=""/>
+        <p:cNvGrpSpPr/>
+        <p:nvPr/>
+      </p:nvGrpSpPr>
+      <p:grpSpPr>
+        <a:xfrm>
+          <a:off x="0" y="0"/>
+          <a:ext cx="0" cy="0"/>
+          <a:chOff x="0" y="0"/>
+          <a:chExt cx="0" cy="0"/>
+        </a:xfrm>
+      </p:grpSpPr>
+      <p:sp>
+        <p:nvSpPr>
+          <p:cNvPr id="2" name="Slide Image Placeholder 1"/>
+          <p:cNvSpPr>
+            <a:spLocks noGrp="1" noRot="1" noChangeAspect="1"/>
+          </p:cNvSpPr>
+          <p:nvPr>
+            <p:ph type="sldImg"/>
+          </p:nvPr>
+        </p:nvSpPr>
+        <p:spPr>
+          <a:xfrm>
+            <a:off x="381000" y="685800"/>
+            <a:ext cx="6096000" cy="3429000"/>
+          </a:xfrm>
+        </p:spPr>
+      </p:sp>
+      <p:sp>
+        <p:nvSpPr>
+          <p:cNvPr id="3" name="Notes Placeholder 2"/>
+          <p:cNvSpPr>
+            <a:spLocks noGrp="1"/>
+          </p:cNvSpPr>
+          <p:nvPr>
+            <p:ph type="body" idx="1"/>
+          </p:nvPr>
+        </p:nvSpPr>
+        <p:spPr/>
+        <p:txBody>
+          <a:bodyPr/>
+          <a:lstStyle/>
+          <a:p>
+            <a:endParaRPr lang="en-US" dirty="0"/>
+          </a:p>
+        </p:txBody>
+      </p:sp>
+    </p:spTree>
+    <p:extLst>
+      <p:ext uri="{BB962C8B-B14F-4D97-AF65-F5344CB8AC3E}">
         <p14:creationId xmlns:p14="http://schemas.microsoft.com/office/powerpoint/2010/main" val="2444723583"/>
       </p:ext>
     </p:extLst>
@@ -1599,7 +1666,7 @@
 </p:notes>
 </file>
 
-<file path=ppt/notesSlides/notesSlide13.xml><?xml version="1.0" encoding="utf-8"?>
+<file path=ppt/notesSlides/notesSlide14.xml><?xml version="1.0" encoding="utf-8"?>
 <p:notes xmlns:a="http://schemas.openxmlformats.org/drawingml/2006/main" xmlns:r="http://schemas.openxmlformats.org/officeDocument/2006/relationships" xmlns:p="http://schemas.openxmlformats.org/presentationml/2006/main" showMasterSp="0" showMasterPhAnim="0">
   <p:cSld>
     <p:spTree>
@@ -29843,9 +29910,87 @@
           <a:lstStyle/>
           <a:p>
             <a:r>
+              <a:rPr lang="de-CH" sz="1400" b="1" dirty="0">
+                <a:hlinkClick r:id="rId3"/>
+              </a:rPr>
+              <a:t>draft-ietf-bmwg-mlrsearch</a:t>
+            </a:r>
+            <a:r>
               <a:rPr lang="de-CH" sz="1400" b="1" dirty="0"/>
-              <a:t>TBD</a:t>
+              <a:t> </a:t>
             </a:r>
+            <a:r>
+              <a:rPr lang="en-US" sz="1400" dirty="0"/>
+              <a:t>in RFC Ed Queue</a:t>
+            </a:r>
+            <a:endParaRPr lang="de-CH" sz="1200" dirty="0"/>
+          </a:p>
+          <a:p>
+            <a:r>
+              <a:rPr lang="de-CH" sz="1400" b="1" dirty="0">
+                <a:hlinkClick r:id="rId4"/>
+              </a:rPr>
+              <a:t>draft-ietf-bmwg-network-tester-cfg</a:t>
+            </a:r>
+            <a:r>
+              <a:rPr lang="de-CH" sz="1400" dirty="0"/>
+              <a:t> passed WGLC</a:t>
+            </a:r>
+          </a:p>
+          <a:p>
+            <a:pPr lvl="1"/>
+            <a:r>
+              <a:rPr lang="de-CH" sz="1200" dirty="0"/>
+              <a:t>New revision in preparation to address the Yangdoctors review</a:t>
+            </a:r>
+          </a:p>
+          <a:p>
+            <a:r>
+              <a:rPr lang="de-CH" sz="1400" b="1" dirty="0">
+                <a:hlinkClick r:id="rId5"/>
+              </a:rPr>
+              <a:t>draft-ietf-bmwg-sr-bench-meth</a:t>
+            </a:r>
+            <a:r>
+              <a:rPr lang="de-CH" sz="1400" dirty="0"/>
+              <a:t> passed WGLC</a:t>
+            </a:r>
+          </a:p>
+          <a:p>
+            <a:r>
+              <a:rPr lang="de-CH" sz="1400" b="1" dirty="0">
+                <a:hlinkClick r:id="rId6"/>
+              </a:rPr>
+              <a:t>draft-ietf-bmwg-savnet-sav-benchmarking</a:t>
+            </a:r>
+            <a:r>
+              <a:rPr lang="de-CH" sz="1400" dirty="0"/>
+              <a:t> and </a:t>
+            </a:r>
+            <a:r>
+              <a:rPr lang="de-CH" sz="1400" b="1" dirty="0">
+                <a:hlinkClick r:id="rId7"/>
+              </a:rPr>
+              <a:t>draft-ietf-bmwg-powerbench</a:t>
+            </a:r>
+            <a:r>
+              <a:rPr lang="de-CH" sz="1400" dirty="0"/>
+              <a:t> adopted</a:t>
+            </a:r>
+          </a:p>
+          <a:p>
+            <a:r>
+              <a:rPr lang="de-CH" sz="1400" dirty="0"/>
+              <a:t>To resume the discussion for revisiting BMWG RFCs in order to update RFC 2544</a:t>
+            </a:r>
+          </a:p>
+          <a:p>
+            <a:r>
+              <a:rPr lang="en-US" sz="1400" dirty="0"/>
+              <a:t>Rechartering to include new work on AI (either for a joint future with IPPM or separately)</a:t>
+            </a:r>
+          </a:p>
+          <a:p>
             <a:endParaRPr lang="en-US" sz="1400" dirty="0"/>
           </a:p>
         </p:txBody>
@@ -29864,6 +30009,207 @@
 </file>
 
 <file path=ppt/slides/slide13.xml><?xml version="1.0" encoding="utf-8"?>
+<p:sld xmlns:a="http://schemas.openxmlformats.org/drawingml/2006/main" xmlns:r="http://schemas.openxmlformats.org/officeDocument/2006/relationships" xmlns:p="http://schemas.openxmlformats.org/presentationml/2006/main">
+  <p:cSld>
+    <p:spTree>
+      <p:nvGrpSpPr>
+        <p:cNvPr id="1" name=""/>
+        <p:cNvGrpSpPr/>
+        <p:nvPr/>
+      </p:nvGrpSpPr>
+      <p:grpSpPr>
+        <a:xfrm>
+          <a:off x="0" y="0"/>
+          <a:ext cx="0" cy="0"/>
+          <a:chOff x="0" y="0"/>
+          <a:chExt cx="0" cy="0"/>
+        </a:xfrm>
+      </p:grpSpPr>
+      <p:sp>
+        <p:nvSpPr>
+          <p:cNvPr id="2" name="Title 1">
+            <a:extLst>
+              <a:ext uri="{FF2B5EF4-FFF2-40B4-BE49-F238E27FC236}">
+                <a16:creationId xmlns:a16="http://schemas.microsoft.com/office/drawing/2014/main" id="{0B9E15DC-F076-98D2-1BDF-BC01FEC9047B}"/>
+              </a:ext>
+            </a:extLst>
+          </p:cNvPr>
+          <p:cNvSpPr>
+            <a:spLocks noGrp="1"/>
+          </p:cNvSpPr>
+          <p:nvPr>
+            <p:ph type="title"/>
+          </p:nvPr>
+        </p:nvSpPr>
+        <p:spPr>
+          <a:xfrm>
+            <a:off x="471899" y="218223"/>
+            <a:ext cx="8395009" cy="1288203"/>
+          </a:xfrm>
+        </p:spPr>
+        <p:txBody>
+          <a:bodyPr anchor="ctr"/>
+          <a:lstStyle/>
+          <a:p>
+            <a:r>
+              <a:rPr lang="en-US" sz="3200" dirty="0"/>
+              <a:t>draft-</a:t>
+            </a:r>
+            <a:r>
+              <a:rPr lang="en-US" sz="3200" dirty="0" err="1"/>
+              <a:t>ietf</a:t>
+            </a:r>
+            <a:r>
+              <a:rPr lang="en-US" sz="3200" dirty="0"/>
+              <a:t>-bmwg-</a:t>
+            </a:r>
+            <a:r>
+              <a:rPr lang="en-US" sz="3200" dirty="0" err="1"/>
+              <a:t>sr</a:t>
+            </a:r>
+            <a:r>
+              <a:rPr lang="en-US" sz="3200" dirty="0"/>
+              <a:t>-bench-meth: Recap</a:t>
+            </a:r>
+          </a:p>
+        </p:txBody>
+      </p:sp>
+      <p:sp>
+        <p:nvSpPr>
+          <p:cNvPr id="4" name="Slide Number Placeholder 3">
+            <a:extLst>
+              <a:ext uri="{FF2B5EF4-FFF2-40B4-BE49-F238E27FC236}">
+                <a16:creationId xmlns:a16="http://schemas.microsoft.com/office/drawing/2014/main" id="{D216BDC7-4DE9-D9D5-0725-BBEF6CFE8DF1}"/>
+              </a:ext>
+            </a:extLst>
+          </p:cNvPr>
+          <p:cNvSpPr>
+            <a:spLocks noGrp="1"/>
+          </p:cNvSpPr>
+          <p:nvPr>
+            <p:ph type="sldNum" idx="12"/>
+          </p:nvPr>
+        </p:nvSpPr>
+        <p:spPr>
+          <a:xfrm>
+            <a:off x="8694000" y="4724798"/>
+            <a:ext cx="378241" cy="335251"/>
+          </a:xfrm>
+        </p:spPr>
+        <p:txBody>
+          <a:bodyPr/>
+          <a:lstStyle/>
+          <a:p>
+            <a:pPr marL="0" lvl="0" indent="0" algn="r" rtl="0">
+              <a:spcBef>
+                <a:spcPts val="0"/>
+              </a:spcBef>
+              <a:spcAft>
+                <a:spcPts val="0"/>
+              </a:spcAft>
+              <a:buNone/>
+            </a:pPr>
+            <a:fld id="{00000000-1234-1234-1234-123412341234}" type="slidenum">
+              <a:rPr lang="en-US" smtClean="0"/>
+              <a:t>13</a:t>
+            </a:fld>
+            <a:endParaRPr lang="en-US" dirty="0"/>
+          </a:p>
+        </p:txBody>
+      </p:sp>
+      <p:sp>
+        <p:nvSpPr>
+          <p:cNvPr id="6" name="Text Placeholder 5">
+            <a:extLst>
+              <a:ext uri="{FF2B5EF4-FFF2-40B4-BE49-F238E27FC236}">
+                <a16:creationId xmlns:a16="http://schemas.microsoft.com/office/drawing/2014/main" id="{9B63D804-4B5F-4907-8FDB-DA07AF740353}"/>
+              </a:ext>
+            </a:extLst>
+          </p:cNvPr>
+          <p:cNvSpPr>
+            <a:spLocks noGrp="1"/>
+          </p:cNvSpPr>
+          <p:nvPr>
+            <p:ph type="body" idx="1"/>
+          </p:nvPr>
+        </p:nvSpPr>
+        <p:spPr>
+          <a:xfrm>
+            <a:off x="471900" y="1807696"/>
+            <a:ext cx="8222100" cy="3006203"/>
+          </a:xfrm>
+        </p:spPr>
+        <p:txBody>
+          <a:bodyPr/>
+          <a:lstStyle/>
+          <a:p>
+            <a:r>
+              <a:rPr lang="en-US" dirty="0"/>
+              <a:t>WGLC issued, cross posted to IPPM, SPRING, SRv6OPS.</a:t>
+            </a:r>
+          </a:p>
+          <a:p>
+            <a:pPr lvl="1"/>
+            <a:r>
+              <a:rPr lang="en-US" sz="1600" dirty="0"/>
+              <a:t>Overall good support from BMWG.</a:t>
+            </a:r>
+          </a:p>
+          <a:p>
+            <a:pPr lvl="1"/>
+            <a:r>
+              <a:rPr lang="en-US" sz="1600" dirty="0"/>
+              <a:t>Comments will be incorporated just after IETF 125:</a:t>
+            </a:r>
+          </a:p>
+          <a:p>
+            <a:pPr lvl="2"/>
+            <a:r>
+              <a:rPr lang="en-US" sz="1400" dirty="0"/>
+              <a:t>Section 4.3 (Frame Formats and Sizes): Reword to clarify that “Fragmentation of IPv4 packet” is “out of scope”.</a:t>
+            </a:r>
+          </a:p>
+          <a:p>
+            <a:pPr lvl="2"/>
+            <a:r>
+              <a:rPr lang="en-US" sz="1400" dirty="0"/>
+              <a:t>Section 4.4 (Protocol Addresses): add an explicit MUST-report item in Section 5 (Reporting Format) indicating which fields are used as the hashing keys for ECMP and how traffic streams are randomized.</a:t>
+            </a:r>
+          </a:p>
+          <a:p>
+            <a:pPr lvl="2"/>
+            <a:r>
+              <a:rPr lang="en-US" sz="1400" dirty="0"/>
+              <a:t>Section 4.5 (Trial Duration): Remove duplicated text around hold-time considerations.</a:t>
+            </a:r>
+            <a:endParaRPr lang="en-US" sz="1600" dirty="0"/>
+          </a:p>
+          <a:p>
+            <a:pPr lvl="1"/>
+            <a:r>
+              <a:rPr lang="en-US" sz="1600" dirty="0"/>
+              <a:t>Thanks to all who supported the work!</a:t>
+            </a:r>
+          </a:p>
+          <a:p>
+            <a:endParaRPr lang="en-US" dirty="0"/>
+          </a:p>
+        </p:txBody>
+      </p:sp>
+    </p:spTree>
+    <p:extLst>
+      <p:ext uri="{BB962C8B-B14F-4D97-AF65-F5344CB8AC3E}">
+        <p14:creationId xmlns:p14="http://schemas.microsoft.com/office/powerpoint/2010/main" val="915069421"/>
+      </p:ext>
+    </p:extLst>
+  </p:cSld>
+  <p:clrMapOvr>
+    <a:masterClrMapping/>
+  </p:clrMapOvr>
+</p:sld>
+</file>
+
+<file path=ppt/slides/slide14.xml><?xml version="1.0" encoding="utf-8"?>
 <p:sld xmlns:a="http://schemas.openxmlformats.org/drawingml/2006/main" xmlns:r="http://schemas.openxmlformats.org/officeDocument/2006/relationships" xmlns:p="http://schemas.openxmlformats.org/presentationml/2006/main">
   <p:cSld>
     <p:spTree>
@@ -29945,7 +30291,7 @@
             </a:pPr>
             <a:fld id="{00000000-1234-1234-1234-123412341234}" type="slidenum">
               <a:rPr lang="en-US" smtClean="0"/>
-              <a:t>13</a:t>
+              <a:t>14</a:t>
             </a:fld>
             <a:endParaRPr lang="en-US" dirty="0"/>
           </a:p>
@@ -30003,7 +30349,7 @@
 </p:sld>
 </file>
 
-<file path=ppt/slides/slide14.xml><?xml version="1.0" encoding="utf-8"?>
+<file path=ppt/slides/slide15.xml><?xml version="1.0" encoding="utf-8"?>
 <p:sld xmlns:a="http://schemas.openxmlformats.org/drawingml/2006/main" xmlns:r="http://schemas.openxmlformats.org/officeDocument/2006/relationships" xmlns:p="http://schemas.openxmlformats.org/presentationml/2006/main" show="0">
   <p:cSld>
     <p:spTree>
@@ -30350,7 +30696,7 @@
             </a:pPr>
             <a:fld id="{00000000-1234-1234-1234-123412341234}" type="slidenum">
               <a:rPr lang="en-US"/>
-              <a:t>14</a:t>
+              <a:t>15</a:t>
             </a:fld>
             <a:endParaRPr dirty="0"/>
           </a:p>
@@ -34425,6 +34771,14 @@
 </file>
 
 <file path=customXml/item1.xml><?xml version="1.0" encoding="utf-8"?>
+<p:properties xmlns:p="http://schemas.microsoft.com/office/2006/metadata/properties" xmlns:xsi="http://www.w3.org/2001/XMLSchema-instance" xmlns:pc="http://schemas.microsoft.com/office/infopath/2007/PartnerControls">
+  <documentManagement>
+    <_activity xmlns="3e5e162a-5953-4fde-83b3-9639e6ab13bb" xsi:nil="true"/>
+  </documentManagement>
+</p:properties>
+</file>
+
+<file path=customXml/item2.xml><?xml version="1.0" encoding="utf-8"?>
 <ct:contentTypeSchema xmlns:ct="http://schemas.microsoft.com/office/2006/metadata/contentType" xmlns:ma="http://schemas.microsoft.com/office/2006/metadata/properties/metaAttributes" ct:_="" ma:_="" ma:contentTypeName="Dokument" ma:contentTypeID="0x01010028792A905D4FBE4781303B372FFF56B7" ma:contentTypeVersion="18" ma:contentTypeDescription="Ein neues Dokument erstellen." ma:contentTypeScope="" ma:versionID="1bed101c48ab8d637c0f10f3a19033d6">
   <xsd:schema xmlns:xsd="http://www.w3.org/2001/XMLSchema" xmlns:xs="http://www.w3.org/2001/XMLSchema" xmlns:p="http://schemas.microsoft.com/office/2006/metadata/properties" xmlns:ns3="3e5e162a-5953-4fde-83b3-9639e6ab13bb" xmlns:ns4="266fa233-377d-43d6-82a1-e70154e55ff7" targetNamespace="http://schemas.microsoft.com/office/2006/metadata/properties" ma:root="true" ma:fieldsID="ad54ca06dfd6fdd081bd33575dcf7e57" ns3:_="" ns4:_="">
     <xsd:import namespace="3e5e162a-5953-4fde-83b3-9639e6ab13bb"/>
@@ -34677,7 +35031,7 @@
 </ct:contentTypeSchema>
 </file>
 
-<file path=customXml/item2.xml><?xml version="1.0" encoding="utf-8"?>
+<file path=customXml/item3.xml><?xml version="1.0" encoding="utf-8"?>
 <?mso-contentType ?>
 <FormTemplates xmlns="http://schemas.microsoft.com/sharepoint/v3/contenttype/forms">
   <Display>DocumentLibraryForm</Display>
@@ -34686,15 +35040,24 @@
 </FormTemplates>
 </file>
 
-<file path=customXml/item3.xml><?xml version="1.0" encoding="utf-8"?>
-<p:properties xmlns:p="http://schemas.microsoft.com/office/2006/metadata/properties" xmlns:xsi="http://www.w3.org/2001/XMLSchema-instance" xmlns:pc="http://schemas.microsoft.com/office/infopath/2007/PartnerControls">
-  <documentManagement>
-    <_activity xmlns="3e5e162a-5953-4fde-83b3-9639e6ab13bb" xsi:nil="true"/>
-  </documentManagement>
-</p:properties>
+<file path=customXml/itemProps1.xml><?xml version="1.0" encoding="utf-8"?>
+<ds:datastoreItem xmlns:ds="http://schemas.openxmlformats.org/officeDocument/2006/customXml" ds:itemID="{3D7021EF-4D3D-4708-92FB-F2CD02CEF7A1}">
+  <ds:schemaRefs>
+    <ds:schemaRef ds:uri="http://schemas.openxmlformats.org/package/2006/metadata/core-properties"/>
+    <ds:schemaRef ds:uri="http://schemas.microsoft.com/office/2006/documentManagement/types"/>
+    <ds:schemaRef ds:uri="http://schemas.microsoft.com/office/infopath/2007/PartnerControls"/>
+    <ds:schemaRef ds:uri="http://purl.org/dc/elements/1.1/"/>
+    <ds:schemaRef ds:uri="http://schemas.microsoft.com/office/2006/metadata/properties"/>
+    <ds:schemaRef ds:uri="3e5e162a-5953-4fde-83b3-9639e6ab13bb"/>
+    <ds:schemaRef ds:uri="266fa233-377d-43d6-82a1-e70154e55ff7"/>
+    <ds:schemaRef ds:uri="http://purl.org/dc/terms/"/>
+    <ds:schemaRef ds:uri="http://www.w3.org/XML/1998/namespace"/>
+    <ds:schemaRef ds:uri="http://purl.org/dc/dcmitype/"/>
+  </ds:schemaRefs>
+</ds:datastoreItem>
 </file>
 
-<file path=customXml/itemProps1.xml><?xml version="1.0" encoding="utf-8"?>
+<file path=customXml/itemProps2.xml><?xml version="1.0" encoding="utf-8"?>
 <ds:datastoreItem xmlns:ds="http://schemas.openxmlformats.org/officeDocument/2006/customXml" ds:itemID="{F4805544-B524-4E4A-B7C1-6ABFC599928D}">
   <ds:schemaRefs>
     <ds:schemaRef ds:uri="http://schemas.microsoft.com/office/2006/metadata/contentType"/>
@@ -34713,27 +35076,10 @@
 </ds:datastoreItem>
 </file>
 
-<file path=customXml/itemProps2.xml><?xml version="1.0" encoding="utf-8"?>
+<file path=customXml/itemProps3.xml><?xml version="1.0" encoding="utf-8"?>
 <ds:datastoreItem xmlns:ds="http://schemas.openxmlformats.org/officeDocument/2006/customXml" ds:itemID="{9104BBC9-6B71-4DC1-A0E0-1E198363AC7F}">
   <ds:schemaRefs>
     <ds:schemaRef ds:uri="http://schemas.microsoft.com/sharepoint/v3/contenttype/forms"/>
-  </ds:schemaRefs>
-</ds:datastoreItem>
-</file>
-
-<file path=customXml/itemProps3.xml><?xml version="1.0" encoding="utf-8"?>
-<ds:datastoreItem xmlns:ds="http://schemas.openxmlformats.org/officeDocument/2006/customXml" ds:itemID="{3D7021EF-4D3D-4708-92FB-F2CD02CEF7A1}">
-  <ds:schemaRefs>
-    <ds:schemaRef ds:uri="http://schemas.openxmlformats.org/package/2006/metadata/core-properties"/>
-    <ds:schemaRef ds:uri="http://schemas.microsoft.com/office/2006/documentManagement/types"/>
-    <ds:schemaRef ds:uri="http://schemas.microsoft.com/office/infopath/2007/PartnerControls"/>
-    <ds:schemaRef ds:uri="http://purl.org/dc/elements/1.1/"/>
-    <ds:schemaRef ds:uri="http://schemas.microsoft.com/office/2006/metadata/properties"/>
-    <ds:schemaRef ds:uri="3e5e162a-5953-4fde-83b3-9639e6ab13bb"/>
-    <ds:schemaRef ds:uri="266fa233-377d-43d6-82a1-e70154e55ff7"/>
-    <ds:schemaRef ds:uri="http://purl.org/dc/terms/"/>
-    <ds:schemaRef ds:uri="http://www.w3.org/XML/1998/namespace"/>
-    <ds:schemaRef ds:uri="http://purl.org/dc/dcmitype/"/>
   </ds:schemaRefs>
 </ds:datastoreItem>
 </file>

--- a/ietf125-Shenzhen/slides/chair-slides-bmwg-ippm.pptx
+++ b/ietf125-Shenzhen/slides/chair-slides-bmwg-ippm.pptx
@@ -7,7 +7,7 @@
     <p:sldMasterId id="2147483666" r:id="rId6"/>
   </p:sldMasterIdLst>
   <p:notesMasterIdLst>
-    <p:notesMasterId r:id="rId22"/>
+    <p:notesMasterId r:id="rId23"/>
   </p:notesMasterIdLst>
   <p:sldIdLst>
     <p:sldId id="256" r:id="rId7"/>
@@ -21,53 +21,54 @@
     <p:sldId id="263" r:id="rId15"/>
     <p:sldId id="264" r:id="rId16"/>
     <p:sldId id="271" r:id="rId17"/>
-    <p:sldId id="266" r:id="rId18"/>
-    <p:sldId id="273" r:id="rId19"/>
-    <p:sldId id="269" r:id="rId20"/>
-    <p:sldId id="260" r:id="rId21"/>
+    <p:sldId id="274" r:id="rId18"/>
+    <p:sldId id="266" r:id="rId19"/>
+    <p:sldId id="273" r:id="rId20"/>
+    <p:sldId id="269" r:id="rId21"/>
+    <p:sldId id="260" r:id="rId22"/>
   </p:sldIdLst>
   <p:sldSz cx="9144000" cy="5143500" type="screen16x9"/>
   <p:notesSz cx="6858000" cy="9144000"/>
   <p:embeddedFontLst>
     <p:embeddedFont>
       <p:font typeface="Inter" panose="020B0604020202020204" charset="0"/>
-      <p:regular r:id="rId23"/>
-      <p:bold r:id="rId24"/>
-      <p:italic r:id="rId25"/>
-      <p:boldItalic r:id="rId26"/>
+      <p:regular r:id="rId24"/>
+      <p:bold r:id="rId25"/>
+      <p:italic r:id="rId26"/>
+      <p:boldItalic r:id="rId27"/>
     </p:embeddedFont>
     <p:embeddedFont>
       <p:font typeface="Montserrat" panose="00000500000000000000" pitchFamily="2" charset="0"/>
-      <p:regular r:id="rId27"/>
-      <p:bold r:id="rId28"/>
-      <p:italic r:id="rId29"/>
-      <p:boldItalic r:id="rId30"/>
+      <p:regular r:id="rId28"/>
+      <p:bold r:id="rId29"/>
+      <p:italic r:id="rId30"/>
+      <p:boldItalic r:id="rId31"/>
     </p:embeddedFont>
     <p:embeddedFont>
       <p:font typeface="Open Sans" panose="020B0606030504020204" pitchFamily="34" charset="0"/>
-      <p:regular r:id="rId31"/>
-      <p:bold r:id="rId32"/>
-      <p:italic r:id="rId33"/>
-      <p:boldItalic r:id="rId34"/>
+      <p:regular r:id="rId32"/>
+      <p:bold r:id="rId33"/>
+      <p:italic r:id="rId34"/>
+      <p:boldItalic r:id="rId35"/>
     </p:embeddedFont>
     <p:embeddedFont>
       <p:font typeface="Open Sans Medium" panose="020B0604020202020204" charset="0"/>
-      <p:regular r:id="rId35"/>
-      <p:bold r:id="rId36"/>
-      <p:italic r:id="rId37"/>
-      <p:boldItalic r:id="rId38"/>
+      <p:regular r:id="rId36"/>
+      <p:bold r:id="rId37"/>
+      <p:italic r:id="rId38"/>
+      <p:boldItalic r:id="rId39"/>
     </p:embeddedFont>
     <p:embeddedFont>
       <p:font typeface="Open Sans SemiBold" panose="020B0706030804020204" pitchFamily="34" charset="0"/>
-      <p:bold r:id="rId39"/>
-      <p:boldItalic r:id="rId40"/>
+      <p:bold r:id="rId40"/>
+      <p:boldItalic r:id="rId41"/>
     </p:embeddedFont>
     <p:embeddedFont>
       <p:font typeface="Roboto" panose="02000000000000000000" pitchFamily="2" charset="0"/>
-      <p:regular r:id="rId41"/>
-      <p:bold r:id="rId42"/>
-      <p:italic r:id="rId43"/>
-      <p:boldItalic r:id="rId44"/>
+      <p:regular r:id="rId42"/>
+      <p:bold r:id="rId43"/>
+      <p:italic r:id="rId44"/>
+      <p:boldItalic r:id="rId45"/>
     </p:embeddedFont>
   </p:embeddedFontLst>
   <p:defaultTextStyle>
@@ -321,13 +322,36 @@
 <file path=ppt/revisionInfo.xml><?xml version="1.0" encoding="utf-8"?>
 <p1510:revInfo xmlns:a="http://schemas.openxmlformats.org/drawingml/2006/main" xmlns:r="http://schemas.openxmlformats.org/officeDocument/2006/relationships" xmlns:p1510="http://schemas.microsoft.com/office/powerpoint/2015/10/main">
   <p1510:revLst>
-    <p1510:client id="{BA3A2461-F736-466E-BB25-A64358F1D84B}" v="1" dt="2026-03-08T10:28:00.251"/>
+    <p1510:client id="{BA3A2461-F736-466E-BB25-A64358F1D84B}" v="5" dt="2026-03-16T02:39:50.778"/>
   </p1510:revLst>
 </p1510:revInfo>
 </file>
 
 <file path=ppt/changesInfos/changesInfo1.xml><?xml version="1.0" encoding="utf-8"?>
 <pc:chgInfo xmlns:a="http://schemas.openxmlformats.org/drawingml/2006/main" xmlns:r="http://schemas.openxmlformats.org/officeDocument/2006/relationships" xmlns:ac="http://schemas.microsoft.com/office/drawing/2013/main/command" xmlns:pc="http://schemas.microsoft.com/office/powerpoint/2013/main/command">
+  <pc:docChgLst>
+    <pc:chgData name="Graf Thomas, SCS-INI-NET-VNC-E2E" userId="487bc3e3-9ce7-4cdd-b7b4-8899ea88d289" providerId="ADAL" clId="{52F89B06-B397-4BA4-9DB6-8A81C30956C2}"/>
+    <pc:docChg chg="addSld delSld modSld">
+      <pc:chgData name="Graf Thomas, SCS-INI-NET-VNC-E2E" userId="487bc3e3-9ce7-4cdd-b7b4-8899ea88d289" providerId="ADAL" clId="{52F89B06-B397-4BA4-9DB6-8A81C30956C2}" dt="2025-11-04T14:39:54.897" v="2" actId="47"/>
+      <pc:docMkLst>
+        <pc:docMk/>
+      </pc:docMkLst>
+      <pc:sldChg chg="del">
+        <pc:chgData name="Graf Thomas, SCS-INI-NET-VNC-E2E" userId="487bc3e3-9ce7-4cdd-b7b4-8899ea88d289" providerId="ADAL" clId="{52F89B06-B397-4BA4-9DB6-8A81C30956C2}" dt="2025-11-04T14:39:54.897" v="2" actId="47"/>
+        <pc:sldMkLst>
+          <pc:docMk/>
+          <pc:sldMk cId="0" sldId="257"/>
+        </pc:sldMkLst>
+      </pc:sldChg>
+      <pc:sldChg chg="add del">
+        <pc:chgData name="Graf Thomas, SCS-INI-NET-VNC-E2E" userId="487bc3e3-9ce7-4cdd-b7b4-8899ea88d289" providerId="ADAL" clId="{52F89B06-B397-4BA4-9DB6-8A81C30956C2}" dt="2025-11-04T14:39:38.974" v="1"/>
+        <pc:sldMkLst>
+          <pc:docMk/>
+          <pc:sldMk cId="0" sldId="272"/>
+        </pc:sldMkLst>
+      </pc:sldChg>
+    </pc:docChg>
+  </pc:docChgLst>
   <pc:docChgLst>
     <pc:chgData name="Marcus Ihlar" userId="3466507a-8f95-47f2-ae1b-ce7d6ca611a4" providerId="ADAL" clId="{AED546ED-D998-4FD7-8756-673BE2DDCF49}"/>
     <pc:docChg chg="modSld">
@@ -352,9 +376,102 @@
     </pc:docChg>
   </pc:docChgLst>
   <pc:docChgLst>
+    <pc:chgData name="Graf Thomas, SCS-INI-NET-VNC-E2E" userId="487bc3e3-9ce7-4cdd-b7b4-8899ea88d289" providerId="ADAL" clId="{4403439A-50EC-49D8-B7F6-3D7264685FDE}"/>
+    <pc:docChg chg="undo custSel addSld modSld sldOrd">
+      <pc:chgData name="Graf Thomas, SCS-INI-NET-VNC-E2E" userId="487bc3e3-9ce7-4cdd-b7b4-8899ea88d289" providerId="ADAL" clId="{4403439A-50EC-49D8-B7F6-3D7264685FDE}" dt="2025-07-21T05:25:01.641" v="1423" actId="1076"/>
+      <pc:docMkLst>
+        <pc:docMk/>
+      </pc:docMkLst>
+      <pc:sldChg chg="modSp mod">
+        <pc:chgData name="Graf Thomas, SCS-INI-NET-VNC-E2E" userId="487bc3e3-9ce7-4cdd-b7b4-8899ea88d289" providerId="ADAL" clId="{4403439A-50EC-49D8-B7F6-3D7264685FDE}" dt="2025-07-10T05:43:59.555" v="6" actId="20577"/>
+        <pc:sldMkLst>
+          <pc:docMk/>
+          <pc:sldMk cId="0" sldId="256"/>
+        </pc:sldMkLst>
+      </pc:sldChg>
+      <pc:sldChg chg="ord">
+        <pc:chgData name="Graf Thomas, SCS-INI-NET-VNC-E2E" userId="487bc3e3-9ce7-4cdd-b7b4-8899ea88d289" providerId="ADAL" clId="{4403439A-50EC-49D8-B7F6-3D7264685FDE}" dt="2025-07-10T06:22:20.341" v="686"/>
+        <pc:sldMkLst>
+          <pc:docMk/>
+          <pc:sldMk cId="0" sldId="259"/>
+        </pc:sldMkLst>
+      </pc:sldChg>
+      <pc:sldChg chg="modSp mod">
+        <pc:chgData name="Graf Thomas, SCS-INI-NET-VNC-E2E" userId="487bc3e3-9ce7-4cdd-b7b4-8899ea88d289" providerId="ADAL" clId="{4403439A-50EC-49D8-B7F6-3D7264685FDE}" dt="2025-07-10T05:48:14.572" v="76" actId="20577"/>
+        <pc:sldMkLst>
+          <pc:docMk/>
+          <pc:sldMk cId="0" sldId="260"/>
+        </pc:sldMkLst>
+      </pc:sldChg>
+      <pc:sldChg chg="modSp mod">
+        <pc:chgData name="Graf Thomas, SCS-INI-NET-VNC-E2E" userId="487bc3e3-9ce7-4cdd-b7b4-8899ea88d289" providerId="ADAL" clId="{4403439A-50EC-49D8-B7F6-3D7264685FDE}" dt="2025-07-10T05:44:34.935" v="15" actId="20577"/>
+        <pc:sldMkLst>
+          <pc:docMk/>
+          <pc:sldMk cId="3471097262" sldId="261"/>
+        </pc:sldMkLst>
+      </pc:sldChg>
+      <pc:sldChg chg="addSp delSp modSp mod">
+        <pc:chgData name="Graf Thomas, SCS-INI-NET-VNC-E2E" userId="487bc3e3-9ce7-4cdd-b7b4-8899ea88d289" providerId="ADAL" clId="{4403439A-50EC-49D8-B7F6-3D7264685FDE}" dt="2025-07-21T05:25:01.641" v="1423" actId="1076"/>
+        <pc:sldMkLst>
+          <pc:docMk/>
+          <pc:sldMk cId="2332748115" sldId="263"/>
+        </pc:sldMkLst>
+      </pc:sldChg>
+      <pc:sldChg chg="addSp delSp modSp mod">
+        <pc:chgData name="Graf Thomas, SCS-INI-NET-VNC-E2E" userId="487bc3e3-9ce7-4cdd-b7b4-8899ea88d289" providerId="ADAL" clId="{4403439A-50EC-49D8-B7F6-3D7264685FDE}" dt="2025-07-14T15:38:27.636" v="757" actId="1076"/>
+        <pc:sldMkLst>
+          <pc:docMk/>
+          <pc:sldMk cId="703495152" sldId="264"/>
+        </pc:sldMkLst>
+      </pc:sldChg>
+      <pc:sldChg chg="modSp mod">
+        <pc:chgData name="Graf Thomas, SCS-INI-NET-VNC-E2E" userId="487bc3e3-9ce7-4cdd-b7b4-8899ea88d289" providerId="ADAL" clId="{4403439A-50EC-49D8-B7F6-3D7264685FDE}" dt="2025-07-10T06:06:38.835" v="223" actId="14100"/>
+        <pc:sldMkLst>
+          <pc:docMk/>
+          <pc:sldMk cId="1372742302" sldId="266"/>
+        </pc:sldMkLst>
+      </pc:sldChg>
+      <pc:sldChg chg="modSp add mod">
+        <pc:chgData name="Graf Thomas, SCS-INI-NET-VNC-E2E" userId="487bc3e3-9ce7-4cdd-b7b4-8899ea88d289" providerId="ADAL" clId="{4403439A-50EC-49D8-B7F6-3D7264685FDE}" dt="2025-07-10T06:00:40.529" v="209" actId="20577"/>
+        <pc:sldMkLst>
+          <pc:docMk/>
+          <pc:sldMk cId="1383312952" sldId="267"/>
+        </pc:sldMkLst>
+      </pc:sldChg>
+      <pc:sldChg chg="modSp add mod ord">
+        <pc:chgData name="Graf Thomas, SCS-INI-NET-VNC-E2E" userId="487bc3e3-9ce7-4cdd-b7b4-8899ea88d289" providerId="ADAL" clId="{4403439A-50EC-49D8-B7F6-3D7264685FDE}" dt="2025-07-10T06:00:34.413" v="207" actId="20577"/>
+        <pc:sldMkLst>
+          <pc:docMk/>
+          <pc:sldMk cId="1659843495" sldId="268"/>
+        </pc:sldMkLst>
+      </pc:sldChg>
+      <pc:sldChg chg="modSp add mod">
+        <pc:chgData name="Graf Thomas, SCS-INI-NET-VNC-E2E" userId="487bc3e3-9ce7-4cdd-b7b4-8899ea88d289" providerId="ADAL" clId="{4403439A-50EC-49D8-B7F6-3D7264685FDE}" dt="2025-07-10T06:19:40.757" v="684" actId="20577"/>
+        <pc:sldMkLst>
+          <pc:docMk/>
+          <pc:sldMk cId="2128497270" sldId="269"/>
+        </pc:sldMkLst>
+      </pc:sldChg>
+      <pc:sldChg chg="modSp add mod ord">
+        <pc:chgData name="Graf Thomas, SCS-INI-NET-VNC-E2E" userId="487bc3e3-9ce7-4cdd-b7b4-8899ea88d289" providerId="ADAL" clId="{4403439A-50EC-49D8-B7F6-3D7264685FDE}" dt="2025-07-15T09:01:50.650" v="1407" actId="20577"/>
+        <pc:sldMkLst>
+          <pc:docMk/>
+          <pc:sldMk cId="2434865477" sldId="270"/>
+        </pc:sldMkLst>
+      </pc:sldChg>
+      <pc:sldChg chg="addSp delSp modSp add mod">
+        <pc:chgData name="Graf Thomas, SCS-INI-NET-VNC-E2E" userId="487bc3e3-9ce7-4cdd-b7b4-8899ea88d289" providerId="ADAL" clId="{4403439A-50EC-49D8-B7F6-3D7264685FDE}" dt="2025-07-14T15:38:57.390" v="780" actId="1076"/>
+        <pc:sldMkLst>
+          <pc:docMk/>
+          <pc:sldMk cId="1859012803" sldId="271"/>
+        </pc:sldMkLst>
+      </pc:sldChg>
+    </pc:docChg>
+  </pc:docChgLst>
+  <pc:docChgLst>
     <pc:chgData name="Graf Thomas, SCS-INI-NET-VNC-E2E" userId="487bc3e3-9ce7-4cdd-b7b4-8899ea88d289" providerId="ADAL" clId="{ADEEF08A-D719-4B50-A383-4105EDA2C206}"/>
-    <pc:docChg chg="custSel modSld">
-      <pc:chgData name="Graf Thomas, SCS-INI-NET-VNC-E2E" userId="487bc3e3-9ce7-4cdd-b7b4-8899ea88d289" providerId="ADAL" clId="{ADEEF08A-D719-4B50-A383-4105EDA2C206}" dt="2026-03-08T10:31:33.624" v="335" actId="20577"/>
+    <pc:docChg chg="custSel addSld delSld modSld sldOrd">
+      <pc:chgData name="Graf Thomas, SCS-INI-NET-VNC-E2E" userId="487bc3e3-9ce7-4cdd-b7b4-8899ea88d289" providerId="ADAL" clId="{ADEEF08A-D719-4B50-A383-4105EDA2C206}" dt="2026-03-16T02:40:37.316" v="585" actId="14100"/>
       <pc:docMkLst>
         <pc:docMk/>
       </pc:docMkLst>
@@ -440,14 +557,6 @@
           <pc:docMk/>
           <pc:sldMk cId="2332748115" sldId="263"/>
         </pc:sldMkLst>
-        <pc:picChg chg="del">
-          <ac:chgData name="Graf Thomas, SCS-INI-NET-VNC-E2E" userId="487bc3e3-9ce7-4cdd-b7b4-8899ea88d289" providerId="ADAL" clId="{ADEEF08A-D719-4B50-A383-4105EDA2C206}" dt="2026-03-08T10:30:06.603" v="301" actId="478"/>
-          <ac:picMkLst>
-            <pc:docMk/>
-            <pc:sldMk cId="2332748115" sldId="263"/>
-            <ac:picMk id="5" creationId="{C77538C2-7C9A-3216-1AE2-BF708EE8B9D4}"/>
-          </ac:picMkLst>
-        </pc:picChg>
         <pc:picChg chg="add mod">
           <ac:chgData name="Graf Thomas, SCS-INI-NET-VNC-E2E" userId="487bc3e3-9ce7-4cdd-b7b4-8899ea88d289" providerId="ADAL" clId="{ADEEF08A-D719-4B50-A383-4105EDA2C206}" dt="2026-03-08T10:30:12.315" v="304" actId="1076"/>
           <ac:picMkLst>
@@ -469,14 +578,6 @@
             <pc:docMk/>
             <pc:sldMk cId="703495152" sldId="264"/>
             <ac:picMk id="5" creationId="{2A7C2331-189C-8472-D7A5-7462F6F8EE24}"/>
-          </ac:picMkLst>
-        </pc:picChg>
-        <pc:picChg chg="del">
-          <ac:chgData name="Graf Thomas, SCS-INI-NET-VNC-E2E" userId="487bc3e3-9ce7-4cdd-b7b4-8899ea88d289" providerId="ADAL" clId="{ADEEF08A-D719-4B50-A383-4105EDA2C206}" dt="2026-03-08T10:30:33.936" v="305" actId="478"/>
-          <ac:picMkLst>
-            <pc:docMk/>
-            <pc:sldMk cId="703495152" sldId="264"/>
-            <ac:picMk id="8" creationId="{89CAAE8C-AD6B-C359-A366-CE2EAD39C893}"/>
           </ac:picMkLst>
         </pc:picChg>
       </pc:sldChg>
@@ -555,20 +656,50 @@
             <ac:spMk id="2" creationId="{0B9E15DC-F076-98D2-1BDF-BC01FEC9047B}"/>
           </ac:spMkLst>
         </pc:spChg>
-        <pc:picChg chg="del">
-          <ac:chgData name="Graf Thomas, SCS-INI-NET-VNC-E2E" userId="487bc3e3-9ce7-4cdd-b7b4-8899ea88d289" providerId="ADAL" clId="{ADEEF08A-D719-4B50-A383-4105EDA2C206}" dt="2026-03-08T10:31:02.458" v="310" actId="478"/>
-          <ac:picMkLst>
-            <pc:docMk/>
-            <pc:sldMk cId="1859012803" sldId="271"/>
-            <ac:picMk id="5" creationId="{45D31BC4-5700-0D94-0AC5-B7C45E3F062E}"/>
-          </ac:picMkLst>
-        </pc:picChg>
         <pc:picChg chg="add mod">
           <ac:chgData name="Graf Thomas, SCS-INI-NET-VNC-E2E" userId="487bc3e3-9ce7-4cdd-b7b4-8899ea88d289" providerId="ADAL" clId="{ADEEF08A-D719-4B50-A383-4105EDA2C206}" dt="2026-03-08T10:31:08.868" v="312" actId="1076"/>
           <ac:picMkLst>
             <pc:docMk/>
             <pc:sldMk cId="1859012803" sldId="271"/>
             <ac:picMk id="6" creationId="{85C6D280-0516-F8D3-85BF-7CA106FAF3CA}"/>
+          </ac:picMkLst>
+        </pc:picChg>
+      </pc:sldChg>
+      <pc:sldChg chg="add del">
+        <pc:chgData name="Graf Thomas, SCS-INI-NET-VNC-E2E" userId="487bc3e3-9ce7-4cdd-b7b4-8899ea88d289" providerId="ADAL" clId="{ADEEF08A-D719-4B50-A383-4105EDA2C206}" dt="2026-03-16T02:22:09.813" v="337" actId="47"/>
+        <pc:sldMkLst>
+          <pc:docMk/>
+          <pc:sldMk cId="752615359" sldId="274"/>
+        </pc:sldMkLst>
+      </pc:sldChg>
+      <pc:sldChg chg="addSp modSp add mod ord">
+        <pc:chgData name="Graf Thomas, SCS-INI-NET-VNC-E2E" userId="487bc3e3-9ce7-4cdd-b7b4-8899ea88d289" providerId="ADAL" clId="{ADEEF08A-D719-4B50-A383-4105EDA2C206}" dt="2026-03-16T02:40:37.316" v="585" actId="14100"/>
+        <pc:sldMkLst>
+          <pc:docMk/>
+          <pc:sldMk cId="1104703509" sldId="274"/>
+        </pc:sldMkLst>
+        <pc:spChg chg="mod">
+          <ac:chgData name="Graf Thomas, SCS-INI-NET-VNC-E2E" userId="487bc3e3-9ce7-4cdd-b7b4-8899ea88d289" providerId="ADAL" clId="{ADEEF08A-D719-4B50-A383-4105EDA2C206}" dt="2026-03-16T02:35:53.505" v="404" actId="20577"/>
+          <ac:spMkLst>
+            <pc:docMk/>
+            <pc:sldMk cId="1104703509" sldId="274"/>
+            <ac:spMk id="2" creationId="{3A62407B-9037-8811-E9B5-967FF3CC1850}"/>
+          </ac:spMkLst>
+        </pc:spChg>
+        <pc:spChg chg="mod">
+          <ac:chgData name="Graf Thomas, SCS-INI-NET-VNC-E2E" userId="487bc3e3-9ce7-4cdd-b7b4-8899ea88d289" providerId="ADAL" clId="{ADEEF08A-D719-4B50-A383-4105EDA2C206}" dt="2026-03-16T02:40:26.643" v="584" actId="14100"/>
+          <ac:spMkLst>
+            <pc:docMk/>
+            <pc:sldMk cId="1104703509" sldId="274"/>
+            <ac:spMk id="6" creationId="{76D2EA37-6A9F-D652-D6D0-0DCBD6441296}"/>
+          </ac:spMkLst>
+        </pc:spChg>
+        <pc:picChg chg="add mod">
+          <ac:chgData name="Graf Thomas, SCS-INI-NET-VNC-E2E" userId="487bc3e3-9ce7-4cdd-b7b4-8899ea88d289" providerId="ADAL" clId="{ADEEF08A-D719-4B50-A383-4105EDA2C206}" dt="2026-03-16T02:40:37.316" v="585" actId="14100"/>
+          <ac:picMkLst>
+            <pc:docMk/>
+            <pc:sldMk cId="1104703509" sldId="274"/>
+            <ac:picMk id="5" creationId="{74860F62-55C1-B405-CE9E-8841E36880C9}"/>
           </ac:picMkLst>
         </pc:picChg>
       </pc:sldChg>
@@ -684,122 +815,6 @@
         <pc:sldMkLst>
           <pc:docMk/>
           <pc:sldMk cId="333926329" sldId="272"/>
-        </pc:sldMkLst>
-      </pc:sldChg>
-    </pc:docChg>
-  </pc:docChgLst>
-  <pc:docChgLst>
-    <pc:chgData name="Graf Thomas, SCS-INI-NET-VNC-E2E" userId="487bc3e3-9ce7-4cdd-b7b4-8899ea88d289" providerId="ADAL" clId="{52F89B06-B397-4BA4-9DB6-8A81C30956C2}"/>
-    <pc:docChg chg="addSld delSld modSld">
-      <pc:chgData name="Graf Thomas, SCS-INI-NET-VNC-E2E" userId="487bc3e3-9ce7-4cdd-b7b4-8899ea88d289" providerId="ADAL" clId="{52F89B06-B397-4BA4-9DB6-8A81C30956C2}" dt="2025-11-04T14:39:54.897" v="2" actId="47"/>
-      <pc:docMkLst>
-        <pc:docMk/>
-      </pc:docMkLst>
-      <pc:sldChg chg="del">
-        <pc:chgData name="Graf Thomas, SCS-INI-NET-VNC-E2E" userId="487bc3e3-9ce7-4cdd-b7b4-8899ea88d289" providerId="ADAL" clId="{52F89B06-B397-4BA4-9DB6-8A81C30956C2}" dt="2025-11-04T14:39:54.897" v="2" actId="47"/>
-        <pc:sldMkLst>
-          <pc:docMk/>
-          <pc:sldMk cId="0" sldId="257"/>
-        </pc:sldMkLst>
-      </pc:sldChg>
-      <pc:sldChg chg="add del">
-        <pc:chgData name="Graf Thomas, SCS-INI-NET-VNC-E2E" userId="487bc3e3-9ce7-4cdd-b7b4-8899ea88d289" providerId="ADAL" clId="{52F89B06-B397-4BA4-9DB6-8A81C30956C2}" dt="2025-11-04T14:39:38.974" v="1"/>
-        <pc:sldMkLst>
-          <pc:docMk/>
-          <pc:sldMk cId="0" sldId="272"/>
-        </pc:sldMkLst>
-      </pc:sldChg>
-    </pc:docChg>
-  </pc:docChgLst>
-  <pc:docChgLst>
-    <pc:chgData name="Graf Thomas, SCS-INI-NET-VNC-E2E" userId="487bc3e3-9ce7-4cdd-b7b4-8899ea88d289" providerId="ADAL" clId="{4403439A-50EC-49D8-B7F6-3D7264685FDE}"/>
-    <pc:docChg chg="undo custSel addSld modSld sldOrd">
-      <pc:chgData name="Graf Thomas, SCS-INI-NET-VNC-E2E" userId="487bc3e3-9ce7-4cdd-b7b4-8899ea88d289" providerId="ADAL" clId="{4403439A-50EC-49D8-B7F6-3D7264685FDE}" dt="2025-07-21T05:25:01.641" v="1423" actId="1076"/>
-      <pc:docMkLst>
-        <pc:docMk/>
-      </pc:docMkLst>
-      <pc:sldChg chg="modSp mod">
-        <pc:chgData name="Graf Thomas, SCS-INI-NET-VNC-E2E" userId="487bc3e3-9ce7-4cdd-b7b4-8899ea88d289" providerId="ADAL" clId="{4403439A-50EC-49D8-B7F6-3D7264685FDE}" dt="2025-07-10T05:43:59.555" v="6" actId="20577"/>
-        <pc:sldMkLst>
-          <pc:docMk/>
-          <pc:sldMk cId="0" sldId="256"/>
-        </pc:sldMkLst>
-      </pc:sldChg>
-      <pc:sldChg chg="ord">
-        <pc:chgData name="Graf Thomas, SCS-INI-NET-VNC-E2E" userId="487bc3e3-9ce7-4cdd-b7b4-8899ea88d289" providerId="ADAL" clId="{4403439A-50EC-49D8-B7F6-3D7264685FDE}" dt="2025-07-10T06:22:20.341" v="686"/>
-        <pc:sldMkLst>
-          <pc:docMk/>
-          <pc:sldMk cId="0" sldId="259"/>
-        </pc:sldMkLst>
-      </pc:sldChg>
-      <pc:sldChg chg="modSp mod">
-        <pc:chgData name="Graf Thomas, SCS-INI-NET-VNC-E2E" userId="487bc3e3-9ce7-4cdd-b7b4-8899ea88d289" providerId="ADAL" clId="{4403439A-50EC-49D8-B7F6-3D7264685FDE}" dt="2025-07-10T05:48:14.572" v="76" actId="20577"/>
-        <pc:sldMkLst>
-          <pc:docMk/>
-          <pc:sldMk cId="0" sldId="260"/>
-        </pc:sldMkLst>
-      </pc:sldChg>
-      <pc:sldChg chg="modSp mod">
-        <pc:chgData name="Graf Thomas, SCS-INI-NET-VNC-E2E" userId="487bc3e3-9ce7-4cdd-b7b4-8899ea88d289" providerId="ADAL" clId="{4403439A-50EC-49D8-B7F6-3D7264685FDE}" dt="2025-07-10T05:44:34.935" v="15" actId="20577"/>
-        <pc:sldMkLst>
-          <pc:docMk/>
-          <pc:sldMk cId="3471097262" sldId="261"/>
-        </pc:sldMkLst>
-      </pc:sldChg>
-      <pc:sldChg chg="addSp delSp modSp mod">
-        <pc:chgData name="Graf Thomas, SCS-INI-NET-VNC-E2E" userId="487bc3e3-9ce7-4cdd-b7b4-8899ea88d289" providerId="ADAL" clId="{4403439A-50EC-49D8-B7F6-3D7264685FDE}" dt="2025-07-21T05:25:01.641" v="1423" actId="1076"/>
-        <pc:sldMkLst>
-          <pc:docMk/>
-          <pc:sldMk cId="2332748115" sldId="263"/>
-        </pc:sldMkLst>
-      </pc:sldChg>
-      <pc:sldChg chg="addSp delSp modSp mod">
-        <pc:chgData name="Graf Thomas, SCS-INI-NET-VNC-E2E" userId="487bc3e3-9ce7-4cdd-b7b4-8899ea88d289" providerId="ADAL" clId="{4403439A-50EC-49D8-B7F6-3D7264685FDE}" dt="2025-07-14T15:38:27.636" v="757" actId="1076"/>
-        <pc:sldMkLst>
-          <pc:docMk/>
-          <pc:sldMk cId="703495152" sldId="264"/>
-        </pc:sldMkLst>
-      </pc:sldChg>
-      <pc:sldChg chg="modSp mod">
-        <pc:chgData name="Graf Thomas, SCS-INI-NET-VNC-E2E" userId="487bc3e3-9ce7-4cdd-b7b4-8899ea88d289" providerId="ADAL" clId="{4403439A-50EC-49D8-B7F6-3D7264685FDE}" dt="2025-07-10T06:06:38.835" v="223" actId="14100"/>
-        <pc:sldMkLst>
-          <pc:docMk/>
-          <pc:sldMk cId="1372742302" sldId="266"/>
-        </pc:sldMkLst>
-      </pc:sldChg>
-      <pc:sldChg chg="modSp add mod">
-        <pc:chgData name="Graf Thomas, SCS-INI-NET-VNC-E2E" userId="487bc3e3-9ce7-4cdd-b7b4-8899ea88d289" providerId="ADAL" clId="{4403439A-50EC-49D8-B7F6-3D7264685FDE}" dt="2025-07-10T06:00:40.529" v="209" actId="20577"/>
-        <pc:sldMkLst>
-          <pc:docMk/>
-          <pc:sldMk cId="1383312952" sldId="267"/>
-        </pc:sldMkLst>
-      </pc:sldChg>
-      <pc:sldChg chg="modSp add mod ord">
-        <pc:chgData name="Graf Thomas, SCS-INI-NET-VNC-E2E" userId="487bc3e3-9ce7-4cdd-b7b4-8899ea88d289" providerId="ADAL" clId="{4403439A-50EC-49D8-B7F6-3D7264685FDE}" dt="2025-07-10T06:00:34.413" v="207" actId="20577"/>
-        <pc:sldMkLst>
-          <pc:docMk/>
-          <pc:sldMk cId="1659843495" sldId="268"/>
-        </pc:sldMkLst>
-      </pc:sldChg>
-      <pc:sldChg chg="modSp add mod">
-        <pc:chgData name="Graf Thomas, SCS-INI-NET-VNC-E2E" userId="487bc3e3-9ce7-4cdd-b7b4-8899ea88d289" providerId="ADAL" clId="{4403439A-50EC-49D8-B7F6-3D7264685FDE}" dt="2025-07-10T06:19:40.757" v="684" actId="20577"/>
-        <pc:sldMkLst>
-          <pc:docMk/>
-          <pc:sldMk cId="2128497270" sldId="269"/>
-        </pc:sldMkLst>
-      </pc:sldChg>
-      <pc:sldChg chg="modSp add mod ord">
-        <pc:chgData name="Graf Thomas, SCS-INI-NET-VNC-E2E" userId="487bc3e3-9ce7-4cdd-b7b4-8899ea88d289" providerId="ADAL" clId="{4403439A-50EC-49D8-B7F6-3D7264685FDE}" dt="2025-07-15T09:01:50.650" v="1407" actId="20577"/>
-        <pc:sldMkLst>
-          <pc:docMk/>
-          <pc:sldMk cId="2434865477" sldId="270"/>
-        </pc:sldMkLst>
-      </pc:sldChg>
-      <pc:sldChg chg="addSp delSp modSp add mod">
-        <pc:chgData name="Graf Thomas, SCS-INI-NET-VNC-E2E" userId="487bc3e3-9ce7-4cdd-b7b4-8899ea88d289" providerId="ADAL" clId="{4403439A-50EC-49D8-B7F6-3D7264685FDE}" dt="2025-07-14T15:38:57.390" v="780" actId="1076"/>
-        <pc:sldMkLst>
-          <pc:docMk/>
-          <pc:sldMk cId="1859012803" sldId="271"/>
         </pc:sldMkLst>
       </pc:sldChg>
     </pc:docChg>
@@ -1473,7 +1488,13 @@
   <p:cSld>
     <p:spTree>
       <p:nvGrpSpPr>
-        <p:cNvPr id="1" name=""/>
+        <p:cNvPr id="1" name="">
+          <a:extLst>
+            <a:ext uri="{FF2B5EF4-FFF2-40B4-BE49-F238E27FC236}">
+              <a16:creationId xmlns:a16="http://schemas.microsoft.com/office/drawing/2014/main" id="{FAF3AFFB-E2C0-713F-660A-13D2800D7CF9}"/>
+            </a:ext>
+          </a:extLst>
+        </p:cNvPr>
         <p:cNvGrpSpPr/>
         <p:nvPr/>
       </p:nvGrpSpPr>
@@ -1487,7 +1508,13 @@
       </p:grpSpPr>
       <p:sp>
         <p:nvSpPr>
-          <p:cNvPr id="2" name="Slide Image Placeholder 1"/>
+          <p:cNvPr id="2" name="Slide Image Placeholder 1">
+            <a:extLst>
+              <a:ext uri="{FF2B5EF4-FFF2-40B4-BE49-F238E27FC236}">
+                <a16:creationId xmlns:a16="http://schemas.microsoft.com/office/drawing/2014/main" id="{7525856C-5FBE-929C-989B-F613D0872E0A}"/>
+              </a:ext>
+            </a:extLst>
+          </p:cNvPr>
           <p:cNvSpPr>
             <a:spLocks noGrp="1" noRot="1" noChangeAspect="1"/>
           </p:cNvSpPr>
@@ -1504,7 +1531,13 @@
       </p:sp>
       <p:sp>
         <p:nvSpPr>
-          <p:cNvPr id="3" name="Notes Placeholder 2"/>
+          <p:cNvPr id="3" name="Notes Placeholder 2">
+            <a:extLst>
+              <a:ext uri="{FF2B5EF4-FFF2-40B4-BE49-F238E27FC236}">
+                <a16:creationId xmlns:a16="http://schemas.microsoft.com/office/drawing/2014/main" id="{8F8C1D1E-D27A-5E15-2E49-91FA8FA77A4D}"/>
+              </a:ext>
+            </a:extLst>
+          </p:cNvPr>
           <p:cNvSpPr>
             <a:spLocks noGrp="1"/>
           </p:cNvSpPr>
@@ -1524,7 +1557,7 @@
     </p:spTree>
     <p:extLst>
       <p:ext uri="{BB962C8B-B14F-4D97-AF65-F5344CB8AC3E}">
-        <p14:creationId xmlns:p14="http://schemas.microsoft.com/office/powerpoint/2010/main" val="708108404"/>
+        <p14:creationId xmlns:p14="http://schemas.microsoft.com/office/powerpoint/2010/main" val="1838026322"/>
       </p:ext>
     </p:extLst>
   </p:cSld>
@@ -1590,7 +1623,7 @@
     </p:spTree>
     <p:extLst>
       <p:ext uri="{BB962C8B-B14F-4D97-AF65-F5344CB8AC3E}">
-        <p14:creationId xmlns:p14="http://schemas.microsoft.com/office/powerpoint/2010/main" val="234543055"/>
+        <p14:creationId xmlns:p14="http://schemas.microsoft.com/office/powerpoint/2010/main" val="708108404"/>
       </p:ext>
     </p:extLst>
   </p:cSld>
@@ -1656,6 +1689,72 @@
     </p:spTree>
     <p:extLst>
       <p:ext uri="{BB962C8B-B14F-4D97-AF65-F5344CB8AC3E}">
+        <p14:creationId xmlns:p14="http://schemas.microsoft.com/office/powerpoint/2010/main" val="234543055"/>
+      </p:ext>
+    </p:extLst>
+  </p:cSld>
+  <p:clrMapOvr>
+    <a:masterClrMapping/>
+  </p:clrMapOvr>
+</p:notes>
+</file>
+
+<file path=ppt/notesSlides/notesSlide14.xml><?xml version="1.0" encoding="utf-8"?>
+<p:notes xmlns:a="http://schemas.openxmlformats.org/drawingml/2006/main" xmlns:r="http://schemas.openxmlformats.org/officeDocument/2006/relationships" xmlns:p="http://schemas.openxmlformats.org/presentationml/2006/main">
+  <p:cSld>
+    <p:spTree>
+      <p:nvGrpSpPr>
+        <p:cNvPr id="1" name=""/>
+        <p:cNvGrpSpPr/>
+        <p:nvPr/>
+      </p:nvGrpSpPr>
+      <p:grpSpPr>
+        <a:xfrm>
+          <a:off x="0" y="0"/>
+          <a:ext cx="0" cy="0"/>
+          <a:chOff x="0" y="0"/>
+          <a:chExt cx="0" cy="0"/>
+        </a:xfrm>
+      </p:grpSpPr>
+      <p:sp>
+        <p:nvSpPr>
+          <p:cNvPr id="2" name="Slide Image Placeholder 1"/>
+          <p:cNvSpPr>
+            <a:spLocks noGrp="1" noRot="1" noChangeAspect="1"/>
+          </p:cNvSpPr>
+          <p:nvPr>
+            <p:ph type="sldImg"/>
+          </p:nvPr>
+        </p:nvSpPr>
+        <p:spPr>
+          <a:xfrm>
+            <a:off x="381000" y="685800"/>
+            <a:ext cx="6096000" cy="3429000"/>
+          </a:xfrm>
+        </p:spPr>
+      </p:sp>
+      <p:sp>
+        <p:nvSpPr>
+          <p:cNvPr id="3" name="Notes Placeholder 2"/>
+          <p:cNvSpPr>
+            <a:spLocks noGrp="1"/>
+          </p:cNvSpPr>
+          <p:nvPr>
+            <p:ph type="body" idx="1"/>
+          </p:nvPr>
+        </p:nvSpPr>
+        <p:spPr/>
+        <p:txBody>
+          <a:bodyPr/>
+          <a:lstStyle/>
+          <a:p>
+            <a:endParaRPr lang="en-US" dirty="0"/>
+          </a:p>
+        </p:txBody>
+      </p:sp>
+    </p:spTree>
+    <p:extLst>
+      <p:ext uri="{BB962C8B-B14F-4D97-AF65-F5344CB8AC3E}">
         <p14:creationId xmlns:p14="http://schemas.microsoft.com/office/powerpoint/2010/main" val="2444723583"/>
       </p:ext>
     </p:extLst>
@@ -1666,7 +1765,7 @@
 </p:notes>
 </file>
 
-<file path=ppt/notesSlides/notesSlide14.xml><?xml version="1.0" encoding="utf-8"?>
+<file path=ppt/notesSlides/notesSlide15.xml><?xml version="1.0" encoding="utf-8"?>
 <p:notes xmlns:a="http://schemas.openxmlformats.org/drawingml/2006/main" xmlns:r="http://schemas.openxmlformats.org/officeDocument/2006/relationships" xmlns:p="http://schemas.openxmlformats.org/presentationml/2006/main" showMasterSp="0" showMasterPhAnim="0">
   <p:cSld>
     <p:spTree>
@@ -29795,6 +29894,220 @@
   <p:cSld>
     <p:spTree>
       <p:nvGrpSpPr>
+        <p:cNvPr id="1" name="">
+          <a:extLst>
+            <a:ext uri="{FF2B5EF4-FFF2-40B4-BE49-F238E27FC236}">
+              <a16:creationId xmlns:a16="http://schemas.microsoft.com/office/drawing/2014/main" id="{85B76EED-4373-6DF0-EF49-568D844F1D5C}"/>
+            </a:ext>
+          </a:extLst>
+        </p:cNvPr>
+        <p:cNvGrpSpPr/>
+        <p:nvPr/>
+      </p:nvGrpSpPr>
+      <p:grpSpPr>
+        <a:xfrm>
+          <a:off x="0" y="0"/>
+          <a:ext cx="0" cy="0"/>
+          <a:chOff x="0" y="0"/>
+          <a:chExt cx="0" cy="0"/>
+        </a:xfrm>
+      </p:grpSpPr>
+      <p:sp>
+        <p:nvSpPr>
+          <p:cNvPr id="2" name="Title 1">
+            <a:extLst>
+              <a:ext uri="{FF2B5EF4-FFF2-40B4-BE49-F238E27FC236}">
+                <a16:creationId xmlns:a16="http://schemas.microsoft.com/office/drawing/2014/main" id="{3A62407B-9037-8811-E9B5-967FF3CC1850}"/>
+              </a:ext>
+            </a:extLst>
+          </p:cNvPr>
+          <p:cNvSpPr>
+            <a:spLocks noGrp="1"/>
+          </p:cNvSpPr>
+          <p:nvPr>
+            <p:ph type="title"/>
+          </p:nvPr>
+        </p:nvSpPr>
+        <p:spPr>
+          <a:xfrm>
+            <a:off x="471899" y="218223"/>
+            <a:ext cx="8395009" cy="1288203"/>
+          </a:xfrm>
+        </p:spPr>
+        <p:txBody>
+          <a:bodyPr anchor="ctr"/>
+          <a:lstStyle/>
+          <a:p>
+            <a:r>
+              <a:rPr lang="en-US" sz="3200" dirty="0"/>
+              <a:t>draft-song-</a:t>
+            </a:r>
+            <a:r>
+              <a:rPr lang="en-US" sz="3200" dirty="0" err="1"/>
+              <a:t>mpls</a:t>
+            </a:r>
+            <a:r>
+              <a:rPr lang="en-US" sz="3200" dirty="0"/>
+              <a:t>-on-path-telemetry-flag</a:t>
+            </a:r>
+            <a:br>
+              <a:rPr lang="en-US" sz="3200" dirty="0"/>
+            </a:br>
+            <a:r>
+              <a:rPr lang="en-US" sz="3200" dirty="0"/>
+              <a:t>MPLS/IPPM/BMWG Joint Adoption Call</a:t>
+            </a:r>
+          </a:p>
+        </p:txBody>
+      </p:sp>
+      <p:sp>
+        <p:nvSpPr>
+          <p:cNvPr id="4" name="Slide Number Placeholder 3">
+            <a:extLst>
+              <a:ext uri="{FF2B5EF4-FFF2-40B4-BE49-F238E27FC236}">
+                <a16:creationId xmlns:a16="http://schemas.microsoft.com/office/drawing/2014/main" id="{CC88A8A6-2627-79D2-86D1-FCA08C0795B3}"/>
+              </a:ext>
+            </a:extLst>
+          </p:cNvPr>
+          <p:cNvSpPr>
+            <a:spLocks noGrp="1"/>
+          </p:cNvSpPr>
+          <p:nvPr>
+            <p:ph type="sldNum" idx="12"/>
+          </p:nvPr>
+        </p:nvSpPr>
+        <p:spPr>
+          <a:xfrm>
+            <a:off x="8694000" y="4724798"/>
+            <a:ext cx="378241" cy="335251"/>
+          </a:xfrm>
+        </p:spPr>
+        <p:txBody>
+          <a:bodyPr/>
+          <a:lstStyle/>
+          <a:p>
+            <a:pPr marL="0" lvl="0" indent="0" algn="r" rtl="0">
+              <a:spcBef>
+                <a:spcPts val="0"/>
+              </a:spcBef>
+              <a:spcAft>
+                <a:spcPts val="0"/>
+              </a:spcAft>
+              <a:buNone/>
+            </a:pPr>
+            <a:fld id="{00000000-1234-1234-1234-123412341234}" type="slidenum">
+              <a:rPr lang="en-US" smtClean="0"/>
+              <a:t>12</a:t>
+            </a:fld>
+            <a:endParaRPr lang="en-US" dirty="0"/>
+          </a:p>
+        </p:txBody>
+      </p:sp>
+      <p:sp>
+        <p:nvSpPr>
+          <p:cNvPr id="6" name="Text Placeholder 5">
+            <a:extLst>
+              <a:ext uri="{FF2B5EF4-FFF2-40B4-BE49-F238E27FC236}">
+                <a16:creationId xmlns:a16="http://schemas.microsoft.com/office/drawing/2014/main" id="{76D2EA37-6A9F-D652-D6D0-0DCBD6441296}"/>
+              </a:ext>
+            </a:extLst>
+          </p:cNvPr>
+          <p:cNvSpPr>
+            <a:spLocks noGrp="1"/>
+          </p:cNvSpPr>
+          <p:nvPr>
+            <p:ph type="body" idx="1"/>
+          </p:nvPr>
+        </p:nvSpPr>
+        <p:spPr>
+          <a:xfrm>
+            <a:off x="471900" y="4011769"/>
+            <a:ext cx="7223227" cy="802129"/>
+          </a:xfrm>
+        </p:spPr>
+        <p:txBody>
+          <a:bodyPr/>
+          <a:lstStyle/>
+          <a:p>
+            <a:pPr marL="114300" indent="0">
+              <a:buNone/>
+            </a:pPr>
+            <a:r>
+              <a:rPr lang="en-US" sz="1400" dirty="0"/>
+              <a:t>We need feedback from the IPPM and BMWG community.</a:t>
+            </a:r>
+          </a:p>
+          <a:p>
+            <a:pPr marL="114300" indent="0">
+              <a:buNone/>
+            </a:pPr>
+            <a:r>
+              <a:rPr lang="en-US" sz="1400" dirty="0"/>
+              <a:t>Please review the document and comment on the adoption call:</a:t>
+            </a:r>
+          </a:p>
+          <a:p>
+            <a:pPr marL="114300" indent="0">
+              <a:buNone/>
+            </a:pPr>
+            <a:r>
+              <a:rPr lang="en-US" sz="1400" dirty="0">
+                <a:hlinkClick r:id="rId3"/>
+              </a:rPr>
+              <a:t>https://mailarchive.ietf.org/arch/msg/ippm/EhSNZ0ndecsyflNhu31ing8ijzA/</a:t>
+            </a:r>
+            <a:endParaRPr lang="en-US" sz="1400" dirty="0"/>
+          </a:p>
+        </p:txBody>
+      </p:sp>
+      <p:pic>
+        <p:nvPicPr>
+          <p:cNvPr id="5" name="Picture 4">
+            <a:extLst>
+              <a:ext uri="{FF2B5EF4-FFF2-40B4-BE49-F238E27FC236}">
+                <a16:creationId xmlns:a16="http://schemas.microsoft.com/office/drawing/2014/main" id="{74860F62-55C1-B405-CE9E-8841E36880C9}"/>
+              </a:ext>
+            </a:extLst>
+          </p:cNvPr>
+          <p:cNvPicPr>
+            <a:picLocks noChangeAspect="1"/>
+          </p:cNvPicPr>
+          <p:nvPr/>
+        </p:nvPicPr>
+        <p:blipFill>
+          <a:blip r:embed="rId4"/>
+          <a:stretch>
+            <a:fillRect/>
+          </a:stretch>
+        </p:blipFill>
+        <p:spPr>
+          <a:xfrm>
+            <a:off x="661788" y="1941304"/>
+            <a:ext cx="6130354" cy="1986751"/>
+          </a:xfrm>
+          <a:prstGeom prst="rect">
+            <a:avLst/>
+          </a:prstGeom>
+        </p:spPr>
+      </p:pic>
+    </p:spTree>
+    <p:extLst>
+      <p:ext uri="{BB962C8B-B14F-4D97-AF65-F5344CB8AC3E}">
+        <p14:creationId xmlns:p14="http://schemas.microsoft.com/office/powerpoint/2010/main" val="1104703509"/>
+      </p:ext>
+    </p:extLst>
+  </p:cSld>
+  <p:clrMapOvr>
+    <a:masterClrMapping/>
+  </p:clrMapOvr>
+</p:sld>
+</file>
+
+<file path=ppt/slides/slide13.xml><?xml version="1.0" encoding="utf-8"?>
+<p:sld xmlns:a="http://schemas.openxmlformats.org/drawingml/2006/main" xmlns:r="http://schemas.openxmlformats.org/officeDocument/2006/relationships" xmlns:p="http://schemas.openxmlformats.org/presentationml/2006/main">
+  <p:cSld>
+    <p:spTree>
+      <p:nvGrpSpPr>
         <p:cNvPr id="1" name=""/>
         <p:cNvGrpSpPr/>
         <p:nvPr/>
@@ -29877,7 +30190,7 @@
             </a:pPr>
             <a:fld id="{00000000-1234-1234-1234-123412341234}" type="slidenum">
               <a:rPr lang="en-US" smtClean="0"/>
-              <a:t>12</a:t>
+              <a:t>13</a:t>
             </a:fld>
             <a:endParaRPr lang="en-US" dirty="0"/>
           </a:p>
@@ -30008,7 +30321,7 @@
 </p:sld>
 </file>
 
-<file path=ppt/slides/slide13.xml><?xml version="1.0" encoding="utf-8"?>
+<file path=ppt/slides/slide14.xml><?xml version="1.0" encoding="utf-8"?>
 <p:sld xmlns:a="http://schemas.openxmlformats.org/drawingml/2006/main" xmlns:r="http://schemas.openxmlformats.org/officeDocument/2006/relationships" xmlns:p="http://schemas.openxmlformats.org/presentationml/2006/main">
   <p:cSld>
     <p:spTree>
@@ -30111,7 +30424,7 @@
             </a:pPr>
             <a:fld id="{00000000-1234-1234-1234-123412341234}" type="slidenum">
               <a:rPr lang="en-US" smtClean="0"/>
-              <a:t>13</a:t>
+              <a:t>14</a:t>
             </a:fld>
             <a:endParaRPr lang="en-US" dirty="0"/>
           </a:p>
@@ -30209,7 +30522,7 @@
 </p:sld>
 </file>
 
-<file path=ppt/slides/slide14.xml><?xml version="1.0" encoding="utf-8"?>
+<file path=ppt/slides/slide15.xml><?xml version="1.0" encoding="utf-8"?>
 <p:sld xmlns:a="http://schemas.openxmlformats.org/drawingml/2006/main" xmlns:r="http://schemas.openxmlformats.org/officeDocument/2006/relationships" xmlns:p="http://schemas.openxmlformats.org/presentationml/2006/main">
   <p:cSld>
     <p:spTree>
@@ -30291,7 +30604,7 @@
             </a:pPr>
             <a:fld id="{00000000-1234-1234-1234-123412341234}" type="slidenum">
               <a:rPr lang="en-US" smtClean="0"/>
-              <a:t>14</a:t>
+              <a:t>15</a:t>
             </a:fld>
             <a:endParaRPr lang="en-US" dirty="0"/>
           </a:p>
@@ -30349,7 +30662,7 @@
 </p:sld>
 </file>
 
-<file path=ppt/slides/slide15.xml><?xml version="1.0" encoding="utf-8"?>
+<file path=ppt/slides/slide16.xml><?xml version="1.0" encoding="utf-8"?>
 <p:sld xmlns:a="http://schemas.openxmlformats.org/drawingml/2006/main" xmlns:r="http://schemas.openxmlformats.org/officeDocument/2006/relationships" xmlns:p="http://schemas.openxmlformats.org/presentationml/2006/main" show="0">
   <p:cSld>
     <p:spTree>
@@ -30696,7 +31009,7 @@
             </a:pPr>
             <a:fld id="{00000000-1234-1234-1234-123412341234}" type="slidenum">
               <a:rPr lang="en-US"/>
-              <a:t>15</a:t>
+              <a:t>16</a:t>
             </a:fld>
             <a:endParaRPr dirty="0"/>
           </a:p>
@@ -31653,7 +31966,7 @@
         <p:fade/>
       </p:transition>
     </mc:Choice>
-    <mc:Fallback xmlns="" xmlns:mv="urn:schemas-microsoft-com:mac:vml" xmlns:c="http://schemas.openxmlformats.org/drawingml/2006/chart" xmlns:dgm="http://schemas.openxmlformats.org/drawingml/2006/diagram" xmlns:o="urn:schemas-microsoft-com:office:office" xmlns:v="urn:schemas-microsoft-com:vml" xmlns:pvml="urn:schemas-microsoft-com:office:powerpoint" xmlns:com="http://schemas.openxmlformats.org/drawingml/2006/compatibility" xmlns:p15="http://schemas.microsoft.com/office/powerpoint/2012/main" xmlns:ahyp="http://schemas.microsoft.com/office/drawing/2018/hyperlinkcolor">
+    <mc:Fallback xmlns:ahyp="http://schemas.microsoft.com/office/drawing/2018/hyperlinkcolor" xmlns:p15="http://schemas.microsoft.com/office/powerpoint/2012/main" xmlns:com="http://schemas.openxmlformats.org/drawingml/2006/compatibility" xmlns:pvml="urn:schemas-microsoft-com:office:powerpoint" xmlns:v="urn:schemas-microsoft-com:vml" xmlns:o="urn:schemas-microsoft-com:office:office" xmlns:dgm="http://schemas.openxmlformats.org/drawingml/2006/diagram" xmlns:c="http://schemas.openxmlformats.org/drawingml/2006/chart" xmlns:mv="urn:schemas-microsoft-com:mac:vml" xmlns="">
       <p:transition spd="slow">
         <p:fade/>
       </p:transition>
@@ -31976,7 +32289,7 @@
         <p:fade/>
       </p:transition>
     </mc:Choice>
-    <mc:Fallback xmlns="" xmlns:mv="urn:schemas-microsoft-com:mac:vml" xmlns:c="http://schemas.openxmlformats.org/drawingml/2006/chart" xmlns:dgm="http://schemas.openxmlformats.org/drawingml/2006/diagram" xmlns:o="urn:schemas-microsoft-com:office:office" xmlns:v="urn:schemas-microsoft-com:vml" xmlns:pvml="urn:schemas-microsoft-com:office:powerpoint" xmlns:com="http://schemas.openxmlformats.org/drawingml/2006/compatibility" xmlns:p15="http://schemas.microsoft.com/office/powerpoint/2012/main" xmlns:ahyp="http://schemas.microsoft.com/office/drawing/2018/hyperlinkcolor">
+    <mc:Fallback xmlns:ahyp="http://schemas.microsoft.com/office/drawing/2018/hyperlinkcolor" xmlns:p15="http://schemas.microsoft.com/office/powerpoint/2012/main" xmlns:com="http://schemas.openxmlformats.org/drawingml/2006/compatibility" xmlns:pvml="urn:schemas-microsoft-com:office:powerpoint" xmlns:v="urn:schemas-microsoft-com:vml" xmlns:o="urn:schemas-microsoft-com:office:office" xmlns:dgm="http://schemas.openxmlformats.org/drawingml/2006/diagram" xmlns:c="http://schemas.openxmlformats.org/drawingml/2006/chart" xmlns:mv="urn:schemas-microsoft-com:mac:vml" xmlns="">
       <p:transition spd="slow">
         <p:fade/>
       </p:transition>
@@ -34771,11 +35084,12 @@
 </file>
 
 <file path=customXml/item1.xml><?xml version="1.0" encoding="utf-8"?>
-<p:properties xmlns:p="http://schemas.microsoft.com/office/2006/metadata/properties" xmlns:xsi="http://www.w3.org/2001/XMLSchema-instance" xmlns:pc="http://schemas.microsoft.com/office/infopath/2007/PartnerControls">
-  <documentManagement>
-    <_activity xmlns="3e5e162a-5953-4fde-83b3-9639e6ab13bb" xsi:nil="true"/>
-  </documentManagement>
-</p:properties>
+<?mso-contentType ?>
+<FormTemplates xmlns="http://schemas.microsoft.com/sharepoint/v3/contenttype/forms">
+  <Display>DocumentLibraryForm</Display>
+  <Edit>DocumentLibraryForm</Edit>
+  <New>DocumentLibraryForm</New>
+</FormTemplates>
 </file>
 
 <file path=customXml/item2.xml><?xml version="1.0" encoding="utf-8"?>
@@ -35032,27 +35346,17 @@
 </file>
 
 <file path=customXml/item3.xml><?xml version="1.0" encoding="utf-8"?>
-<?mso-contentType ?>
-<FormTemplates xmlns="http://schemas.microsoft.com/sharepoint/v3/contenttype/forms">
-  <Display>DocumentLibraryForm</Display>
-  <Edit>DocumentLibraryForm</Edit>
-  <New>DocumentLibraryForm</New>
-</FormTemplates>
+<p:properties xmlns:p="http://schemas.microsoft.com/office/2006/metadata/properties" xmlns:xsi="http://www.w3.org/2001/XMLSchema-instance" xmlns:pc="http://schemas.microsoft.com/office/infopath/2007/PartnerControls">
+  <documentManagement>
+    <_activity xmlns="3e5e162a-5953-4fde-83b3-9639e6ab13bb" xsi:nil="true"/>
+  </documentManagement>
+</p:properties>
 </file>
 
 <file path=customXml/itemProps1.xml><?xml version="1.0" encoding="utf-8"?>
-<ds:datastoreItem xmlns:ds="http://schemas.openxmlformats.org/officeDocument/2006/customXml" ds:itemID="{3D7021EF-4D3D-4708-92FB-F2CD02CEF7A1}">
+<ds:datastoreItem xmlns:ds="http://schemas.openxmlformats.org/officeDocument/2006/customXml" ds:itemID="{9104BBC9-6B71-4DC1-A0E0-1E198363AC7F}">
   <ds:schemaRefs>
-    <ds:schemaRef ds:uri="http://schemas.openxmlformats.org/package/2006/metadata/core-properties"/>
-    <ds:schemaRef ds:uri="http://schemas.microsoft.com/office/2006/documentManagement/types"/>
-    <ds:schemaRef ds:uri="http://schemas.microsoft.com/office/infopath/2007/PartnerControls"/>
-    <ds:schemaRef ds:uri="http://purl.org/dc/elements/1.1/"/>
-    <ds:schemaRef ds:uri="http://schemas.microsoft.com/office/2006/metadata/properties"/>
-    <ds:schemaRef ds:uri="3e5e162a-5953-4fde-83b3-9639e6ab13bb"/>
-    <ds:schemaRef ds:uri="266fa233-377d-43d6-82a1-e70154e55ff7"/>
-    <ds:schemaRef ds:uri="http://purl.org/dc/terms/"/>
-    <ds:schemaRef ds:uri="http://www.w3.org/XML/1998/namespace"/>
-    <ds:schemaRef ds:uri="http://purl.org/dc/dcmitype/"/>
+    <ds:schemaRef ds:uri="http://schemas.microsoft.com/sharepoint/v3/contenttype/forms"/>
   </ds:schemaRefs>
 </ds:datastoreItem>
 </file>
@@ -35077,9 +35381,18 @@
 </file>
 
 <file path=customXml/itemProps3.xml><?xml version="1.0" encoding="utf-8"?>
-<ds:datastoreItem xmlns:ds="http://schemas.openxmlformats.org/officeDocument/2006/customXml" ds:itemID="{9104BBC9-6B71-4DC1-A0E0-1E198363AC7F}">
+<ds:datastoreItem xmlns:ds="http://schemas.openxmlformats.org/officeDocument/2006/customXml" ds:itemID="{3D7021EF-4D3D-4708-92FB-F2CD02CEF7A1}">
   <ds:schemaRefs>
-    <ds:schemaRef ds:uri="http://schemas.microsoft.com/sharepoint/v3/contenttype/forms"/>
+    <ds:schemaRef ds:uri="http://schemas.openxmlformats.org/package/2006/metadata/core-properties"/>
+    <ds:schemaRef ds:uri="http://schemas.microsoft.com/office/2006/documentManagement/types"/>
+    <ds:schemaRef ds:uri="http://schemas.microsoft.com/office/infopath/2007/PartnerControls"/>
+    <ds:schemaRef ds:uri="http://purl.org/dc/elements/1.1/"/>
+    <ds:schemaRef ds:uri="http://schemas.microsoft.com/office/2006/metadata/properties"/>
+    <ds:schemaRef ds:uri="3e5e162a-5953-4fde-83b3-9639e6ab13bb"/>
+    <ds:schemaRef ds:uri="266fa233-377d-43d6-82a1-e70154e55ff7"/>
+    <ds:schemaRef ds:uri="http://purl.org/dc/terms/"/>
+    <ds:schemaRef ds:uri="http://www.w3.org/XML/1998/namespace"/>
+    <ds:schemaRef ds:uri="http://purl.org/dc/dcmitype/"/>
   </ds:schemaRefs>
 </ds:datastoreItem>
 </file>

--- a/ietf125-Shenzhen/slides/chair-slides-bmwg-ippm.pptx
+++ b/ietf125-Shenzhen/slides/chair-slides-bmwg-ippm.pptx
@@ -322,7 +322,7 @@
 <file path=ppt/revisionInfo.xml><?xml version="1.0" encoding="utf-8"?>
 <p1510:revInfo xmlns:a="http://schemas.openxmlformats.org/drawingml/2006/main" xmlns:r="http://schemas.openxmlformats.org/officeDocument/2006/relationships" xmlns:p1510="http://schemas.microsoft.com/office/powerpoint/2015/10/main">
   <p1510:revLst>
-    <p1510:client id="{BA3A2461-F736-466E-BB25-A64358F1D84B}" v="5" dt="2026-03-16T02:39:50.778"/>
+    <p1510:client id="{BA3A2461-F736-466E-BB25-A64358F1D84B}" v="8" dt="2026-03-16T02:54:35.503"/>
   </p1510:revLst>
 </p1510:revInfo>
 </file>
@@ -470,8 +470,8 @@
   </pc:docChgLst>
   <pc:docChgLst>
     <pc:chgData name="Graf Thomas, SCS-INI-NET-VNC-E2E" userId="487bc3e3-9ce7-4cdd-b7b4-8899ea88d289" providerId="ADAL" clId="{ADEEF08A-D719-4B50-A383-4105EDA2C206}"/>
-    <pc:docChg chg="custSel addSld delSld modSld sldOrd">
-      <pc:chgData name="Graf Thomas, SCS-INI-NET-VNC-E2E" userId="487bc3e3-9ce7-4cdd-b7b4-8899ea88d289" providerId="ADAL" clId="{ADEEF08A-D719-4B50-A383-4105EDA2C206}" dt="2026-03-16T02:40:37.316" v="585" actId="14100"/>
+    <pc:docChg chg="undo custSel addSld delSld modSld sldOrd">
+      <pc:chgData name="Graf Thomas, SCS-INI-NET-VNC-E2E" userId="487bc3e3-9ce7-4cdd-b7b4-8899ea88d289" providerId="ADAL" clId="{ADEEF08A-D719-4B50-A383-4105EDA2C206}" dt="2026-03-16T02:57:23.834" v="822" actId="14100"/>
       <pc:docMkLst>
         <pc:docMk/>
       </pc:docMkLst>
@@ -643,7 +643,7 @@
         </pc:spChg>
       </pc:sldChg>
       <pc:sldChg chg="addSp delSp modSp mod">
-        <pc:chgData name="Graf Thomas, SCS-INI-NET-VNC-E2E" userId="487bc3e3-9ce7-4cdd-b7b4-8899ea88d289" providerId="ADAL" clId="{ADEEF08A-D719-4B50-A383-4105EDA2C206}" dt="2026-03-08T10:31:18.398" v="334" actId="20577"/>
+        <pc:chgData name="Graf Thomas, SCS-INI-NET-VNC-E2E" userId="487bc3e3-9ce7-4cdd-b7b4-8899ea88d289" providerId="ADAL" clId="{ADEEF08A-D719-4B50-A383-4105EDA2C206}" dt="2026-03-16T02:57:23.834" v="822" actId="14100"/>
         <pc:sldMkLst>
           <pc:docMk/>
           <pc:sldMk cId="1859012803" sldId="271"/>
@@ -656,8 +656,16 @@
             <ac:spMk id="2" creationId="{0B9E15DC-F076-98D2-1BDF-BC01FEC9047B}"/>
           </ac:spMkLst>
         </pc:spChg>
+        <pc:spChg chg="add mod">
+          <ac:chgData name="Graf Thomas, SCS-INI-NET-VNC-E2E" userId="487bc3e3-9ce7-4cdd-b7b4-8899ea88d289" providerId="ADAL" clId="{ADEEF08A-D719-4B50-A383-4105EDA2C206}" dt="2026-03-16T02:57:23.834" v="822" actId="14100"/>
+          <ac:spMkLst>
+            <pc:docMk/>
+            <pc:sldMk cId="1859012803" sldId="271"/>
+            <ac:spMk id="3" creationId="{24D281E7-F8E0-9C4E-FACE-B48E30DA03D5}"/>
+          </ac:spMkLst>
+        </pc:spChg>
         <pc:picChg chg="add mod">
-          <ac:chgData name="Graf Thomas, SCS-INI-NET-VNC-E2E" userId="487bc3e3-9ce7-4cdd-b7b4-8899ea88d289" providerId="ADAL" clId="{ADEEF08A-D719-4B50-A383-4105EDA2C206}" dt="2026-03-08T10:31:08.868" v="312" actId="1076"/>
+          <ac:chgData name="Graf Thomas, SCS-INI-NET-VNC-E2E" userId="487bc3e3-9ce7-4cdd-b7b4-8899ea88d289" providerId="ADAL" clId="{ADEEF08A-D719-4B50-A383-4105EDA2C206}" dt="2026-03-16T02:56:34.681" v="811" actId="1076"/>
           <ac:picMkLst>
             <pc:docMk/>
             <pc:sldMk cId="1859012803" sldId="271"/>
@@ -702,6 +710,13 @@
             <ac:picMk id="5" creationId="{74860F62-55C1-B405-CE9E-8841E36880C9}"/>
           </ac:picMkLst>
         </pc:picChg>
+      </pc:sldChg>
+      <pc:sldChg chg="add del ord">
+        <pc:chgData name="Graf Thomas, SCS-INI-NET-VNC-E2E" userId="487bc3e3-9ce7-4cdd-b7b4-8899ea88d289" providerId="ADAL" clId="{ADEEF08A-D719-4B50-A383-4105EDA2C206}" dt="2026-03-16T02:52:04.115" v="589" actId="47"/>
+        <pc:sldMkLst>
+          <pc:docMk/>
+          <pc:sldMk cId="1432535309" sldId="275"/>
+        </pc:sldMkLst>
       </pc:sldChg>
     </pc:docChg>
   </pc:docChgLst>
@@ -29868,7 +29883,7 @@
         </p:blipFill>
         <p:spPr>
           <a:xfrm>
-            <a:off x="485462" y="2134400"/>
+            <a:off x="485462" y="1902581"/>
             <a:ext cx="8154538" cy="981212"/>
           </a:xfrm>
           <a:prstGeom prst="rect">
@@ -29876,6 +29891,410 @@
           </a:prstGeom>
         </p:spPr>
       </p:pic>
+      <p:sp>
+        <p:nvSpPr>
+          <p:cNvPr id="3" name="Google Shape;114;p21">
+            <a:extLst>
+              <a:ext uri="{FF2B5EF4-FFF2-40B4-BE49-F238E27FC236}">
+                <a16:creationId xmlns:a16="http://schemas.microsoft.com/office/drawing/2014/main" id="{24D281E7-F8E0-9C4E-FACE-B48E30DA03D5}"/>
+              </a:ext>
+            </a:extLst>
+          </p:cNvPr>
+          <p:cNvSpPr txBox="1">
+            <a:spLocks/>
+          </p:cNvSpPr>
+          <p:nvPr/>
+        </p:nvSpPr>
+        <p:spPr>
+          <a:xfrm>
+            <a:off x="309093" y="2962141"/>
+            <a:ext cx="8330907" cy="1494825"/>
+          </a:xfrm>
+          <a:prstGeom prst="rect">
+            <a:avLst/>
+          </a:prstGeom>
+          <a:noFill/>
+          <a:ln>
+            <a:noFill/>
+          </a:ln>
+        </p:spPr>
+        <p:txBody>
+          <a:bodyPr spcFirstLastPara="1" wrap="square" lIns="91425" tIns="91425" rIns="91425" bIns="91425" anchor="t" anchorCtr="0">
+            <a:noAutofit/>
+          </a:bodyPr>
+          <a:lstStyle>
+            <a:defPPr marR="0" lvl="0" algn="l" rtl="0">
+              <a:lnSpc>
+                <a:spcPct val="100000"/>
+              </a:lnSpc>
+              <a:spcBef>
+                <a:spcPts val="0"/>
+              </a:spcBef>
+              <a:spcAft>
+                <a:spcPts val="0"/>
+              </a:spcAft>
+            </a:defPPr>
+            <a:lvl1pPr marL="457200" marR="0" lvl="0" indent="-342900" algn="l" rtl="0">
+              <a:lnSpc>
+                <a:spcPct val="115000"/>
+              </a:lnSpc>
+              <a:spcBef>
+                <a:spcPts val="0"/>
+              </a:spcBef>
+              <a:spcAft>
+                <a:spcPts val="0"/>
+              </a:spcAft>
+              <a:buClr>
+                <a:srgbClr val="737373"/>
+              </a:buClr>
+              <a:buSzPts val="1800"/>
+              <a:buFont typeface="Montserrat"/>
+              <a:buChar char="●"/>
+              <a:defRPr sz="1800" b="0" i="0" u="none" strike="noStrike" cap="none">
+                <a:solidFill>
+                  <a:srgbClr val="737373"/>
+                </a:solidFill>
+                <a:latin typeface="Montserrat"/>
+                <a:ea typeface="Montserrat"/>
+                <a:cs typeface="Montserrat"/>
+                <a:sym typeface="Montserrat"/>
+              </a:defRPr>
+            </a:lvl1pPr>
+            <a:lvl2pPr marL="914400" marR="0" lvl="1" indent="-342900" algn="l" rtl="0">
+              <a:lnSpc>
+                <a:spcPct val="115000"/>
+              </a:lnSpc>
+              <a:spcBef>
+                <a:spcPts val="0"/>
+              </a:spcBef>
+              <a:spcAft>
+                <a:spcPts val="0"/>
+              </a:spcAft>
+              <a:buClr>
+                <a:srgbClr val="737373"/>
+              </a:buClr>
+              <a:buSzPts val="1800"/>
+              <a:buFont typeface="Montserrat"/>
+              <a:buChar char="○"/>
+              <a:defRPr sz="1800" b="0" i="0" u="none" strike="noStrike" cap="none">
+                <a:solidFill>
+                  <a:srgbClr val="737373"/>
+                </a:solidFill>
+                <a:latin typeface="Montserrat"/>
+                <a:ea typeface="Montserrat"/>
+                <a:cs typeface="Montserrat"/>
+                <a:sym typeface="Montserrat"/>
+              </a:defRPr>
+            </a:lvl2pPr>
+            <a:lvl3pPr marL="1371600" marR="0" lvl="2" indent="-342900" algn="l" rtl="0">
+              <a:lnSpc>
+                <a:spcPct val="115000"/>
+              </a:lnSpc>
+              <a:spcBef>
+                <a:spcPts val="0"/>
+              </a:spcBef>
+              <a:spcAft>
+                <a:spcPts val="0"/>
+              </a:spcAft>
+              <a:buClr>
+                <a:srgbClr val="737373"/>
+              </a:buClr>
+              <a:buSzPts val="1800"/>
+              <a:buFont typeface="Montserrat"/>
+              <a:buChar char="■"/>
+              <a:defRPr sz="1800" b="0" i="0" u="none" strike="noStrike" cap="none">
+                <a:solidFill>
+                  <a:srgbClr val="737373"/>
+                </a:solidFill>
+                <a:latin typeface="Montserrat"/>
+                <a:ea typeface="Montserrat"/>
+                <a:cs typeface="Montserrat"/>
+                <a:sym typeface="Montserrat"/>
+              </a:defRPr>
+            </a:lvl3pPr>
+            <a:lvl4pPr marL="1828800" marR="0" lvl="3" indent="-342900" algn="l" rtl="0">
+              <a:lnSpc>
+                <a:spcPct val="115000"/>
+              </a:lnSpc>
+              <a:spcBef>
+                <a:spcPts val="0"/>
+              </a:spcBef>
+              <a:spcAft>
+                <a:spcPts val="0"/>
+              </a:spcAft>
+              <a:buClr>
+                <a:srgbClr val="737373"/>
+              </a:buClr>
+              <a:buSzPts val="1800"/>
+              <a:buFont typeface="Montserrat"/>
+              <a:buChar char="●"/>
+              <a:defRPr sz="1800" b="0" i="0" u="none" strike="noStrike" cap="none">
+                <a:solidFill>
+                  <a:srgbClr val="737373"/>
+                </a:solidFill>
+                <a:latin typeface="Montserrat"/>
+                <a:ea typeface="Montserrat"/>
+                <a:cs typeface="Montserrat"/>
+                <a:sym typeface="Montserrat"/>
+              </a:defRPr>
+            </a:lvl4pPr>
+            <a:lvl5pPr marL="2286000" marR="0" lvl="4" indent="-342900" algn="l" rtl="0">
+              <a:lnSpc>
+                <a:spcPct val="115000"/>
+              </a:lnSpc>
+              <a:spcBef>
+                <a:spcPts val="0"/>
+              </a:spcBef>
+              <a:spcAft>
+                <a:spcPts val="0"/>
+              </a:spcAft>
+              <a:buClr>
+                <a:srgbClr val="737373"/>
+              </a:buClr>
+              <a:buSzPts val="1800"/>
+              <a:buFont typeface="Montserrat"/>
+              <a:buChar char="○"/>
+              <a:defRPr sz="1800" b="0" i="0" u="none" strike="noStrike" cap="none">
+                <a:solidFill>
+                  <a:srgbClr val="737373"/>
+                </a:solidFill>
+                <a:latin typeface="Montserrat"/>
+                <a:ea typeface="Montserrat"/>
+                <a:cs typeface="Montserrat"/>
+                <a:sym typeface="Montserrat"/>
+              </a:defRPr>
+            </a:lvl5pPr>
+            <a:lvl6pPr marL="2743200" marR="0" lvl="5" indent="-342900" algn="l" rtl="0">
+              <a:lnSpc>
+                <a:spcPct val="115000"/>
+              </a:lnSpc>
+              <a:spcBef>
+                <a:spcPts val="0"/>
+              </a:spcBef>
+              <a:spcAft>
+                <a:spcPts val="0"/>
+              </a:spcAft>
+              <a:buClr>
+                <a:srgbClr val="737373"/>
+              </a:buClr>
+              <a:buSzPts val="1800"/>
+              <a:buFont typeface="Montserrat"/>
+              <a:buChar char="■"/>
+              <a:defRPr sz="1800" b="0" i="0" u="none" strike="noStrike" cap="none">
+                <a:solidFill>
+                  <a:srgbClr val="737373"/>
+                </a:solidFill>
+                <a:latin typeface="Montserrat"/>
+                <a:ea typeface="Montserrat"/>
+                <a:cs typeface="Montserrat"/>
+                <a:sym typeface="Montserrat"/>
+              </a:defRPr>
+            </a:lvl6pPr>
+            <a:lvl7pPr marL="3200400" marR="0" lvl="6" indent="-342900" algn="l" rtl="0">
+              <a:lnSpc>
+                <a:spcPct val="115000"/>
+              </a:lnSpc>
+              <a:spcBef>
+                <a:spcPts val="0"/>
+              </a:spcBef>
+              <a:spcAft>
+                <a:spcPts val="0"/>
+              </a:spcAft>
+              <a:buClr>
+                <a:srgbClr val="737373"/>
+              </a:buClr>
+              <a:buSzPts val="1800"/>
+              <a:buFont typeface="Montserrat"/>
+              <a:buChar char="●"/>
+              <a:defRPr sz="1800" b="0" i="0" u="none" strike="noStrike" cap="none">
+                <a:solidFill>
+                  <a:srgbClr val="737373"/>
+                </a:solidFill>
+                <a:latin typeface="Montserrat"/>
+                <a:ea typeface="Montserrat"/>
+                <a:cs typeface="Montserrat"/>
+                <a:sym typeface="Montserrat"/>
+              </a:defRPr>
+            </a:lvl7pPr>
+            <a:lvl8pPr marL="3657600" marR="0" lvl="7" indent="-342900" algn="l" rtl="0">
+              <a:lnSpc>
+                <a:spcPct val="115000"/>
+              </a:lnSpc>
+              <a:spcBef>
+                <a:spcPts val="0"/>
+              </a:spcBef>
+              <a:spcAft>
+                <a:spcPts val="0"/>
+              </a:spcAft>
+              <a:buClr>
+                <a:srgbClr val="737373"/>
+              </a:buClr>
+              <a:buSzPts val="1800"/>
+              <a:buFont typeface="Montserrat"/>
+              <a:buChar char="○"/>
+              <a:defRPr sz="1800" b="0" i="0" u="none" strike="noStrike" cap="none">
+                <a:solidFill>
+                  <a:srgbClr val="737373"/>
+                </a:solidFill>
+                <a:latin typeface="Montserrat"/>
+                <a:ea typeface="Montserrat"/>
+                <a:cs typeface="Montserrat"/>
+                <a:sym typeface="Montserrat"/>
+              </a:defRPr>
+            </a:lvl8pPr>
+            <a:lvl9pPr marL="4114800" marR="0" lvl="8" indent="-342900" algn="l" rtl="0">
+              <a:lnSpc>
+                <a:spcPct val="115000"/>
+              </a:lnSpc>
+              <a:spcBef>
+                <a:spcPts val="0"/>
+              </a:spcBef>
+              <a:spcAft>
+                <a:spcPts val="0"/>
+              </a:spcAft>
+              <a:buClr>
+                <a:srgbClr val="737373"/>
+              </a:buClr>
+              <a:buSzPts val="1800"/>
+              <a:buFont typeface="Montserrat"/>
+              <a:buChar char="■"/>
+              <a:defRPr sz="1800" b="0" i="0" u="none" strike="noStrike" cap="none">
+                <a:solidFill>
+                  <a:srgbClr val="737373"/>
+                </a:solidFill>
+                <a:latin typeface="Montserrat"/>
+                <a:ea typeface="Montserrat"/>
+                <a:cs typeface="Montserrat"/>
+                <a:sym typeface="Montserrat"/>
+              </a:defRPr>
+            </a:lvl9pPr>
+          </a:lstStyle>
+          <a:p>
+            <a:pPr marL="146050" indent="0">
+              <a:spcBef>
+                <a:spcPts val="600"/>
+              </a:spcBef>
+              <a:buClr>
+                <a:srgbClr val="434343"/>
+              </a:buClr>
+              <a:buSzPts val="1300"/>
+              <a:buNone/>
+            </a:pPr>
+            <a:r>
+              <a:rPr lang="en-US" sz="1300" dirty="0">
+                <a:solidFill>
+                  <a:srgbClr val="434343"/>
+                </a:solidFill>
+                <a:latin typeface="Inter"/>
+                <a:ea typeface="Inter"/>
+                <a:cs typeface="Inter"/>
+                <a:sym typeface="Inter"/>
+              </a:rPr>
+              <a:t>We will raise the following questions to gather your feedback to help with the session planning and understanding the usefulness of the joint sessions.</a:t>
+            </a:r>
+          </a:p>
+          <a:p>
+            <a:pPr lvl="1" indent="-311150">
+              <a:spcBef>
+                <a:spcPts val="1800"/>
+              </a:spcBef>
+              <a:buClr>
+                <a:srgbClr val="434343"/>
+              </a:buClr>
+              <a:buSzPts val="1300"/>
+              <a:buFont typeface="Inter"/>
+              <a:buChar char="●"/>
+            </a:pPr>
+            <a:r>
+              <a:rPr lang="en-US" sz="1300" dirty="0">
+                <a:solidFill>
+                  <a:srgbClr val="434343"/>
+                </a:solidFill>
+                <a:latin typeface="Inter"/>
+                <a:ea typeface="Inter"/>
+                <a:cs typeface="Inter"/>
+                <a:sym typeface="Inter"/>
+              </a:rPr>
+              <a:t>Was there enough time for discussions?</a:t>
+            </a:r>
+          </a:p>
+          <a:p>
+            <a:pPr lvl="1" indent="-311150">
+              <a:spcBef>
+                <a:spcPts val="600"/>
+              </a:spcBef>
+              <a:buClr>
+                <a:srgbClr val="434343"/>
+              </a:buClr>
+              <a:buSzPts val="1300"/>
+              <a:buFont typeface="Inter"/>
+              <a:buChar char="●"/>
+            </a:pPr>
+            <a:r>
+              <a:rPr lang="en-US" sz="1300" dirty="0">
+                <a:solidFill>
+                  <a:srgbClr val="434343"/>
+                </a:solidFill>
+                <a:latin typeface="Inter"/>
+                <a:ea typeface="Inter"/>
+                <a:cs typeface="Inter"/>
+                <a:sym typeface="Inter"/>
+              </a:rPr>
+              <a:t>For your interested topics, was the time well spent?</a:t>
+            </a:r>
+          </a:p>
+          <a:p>
+            <a:pPr lvl="1" indent="-311150">
+              <a:spcBef>
+                <a:spcPts val="600"/>
+              </a:spcBef>
+              <a:buClr>
+                <a:srgbClr val="434343"/>
+              </a:buClr>
+              <a:buSzPts val="1300"/>
+              <a:buFont typeface="Inter"/>
+              <a:buChar char="●"/>
+            </a:pPr>
+            <a:r>
+              <a:rPr lang="en-US" sz="1300" dirty="0">
+                <a:solidFill>
+                  <a:srgbClr val="434343"/>
+                </a:solidFill>
+                <a:latin typeface="Inter"/>
+                <a:ea typeface="Inter"/>
+                <a:cs typeface="Inter"/>
+                <a:sym typeface="Inter"/>
+              </a:rPr>
+              <a:t>Should we allocate more time to proposed work?</a:t>
+            </a:r>
+          </a:p>
+          <a:p>
+            <a:pPr lvl="1" indent="-311150">
+              <a:spcBef>
+                <a:spcPts val="600"/>
+              </a:spcBef>
+              <a:buClr>
+                <a:srgbClr val="434343"/>
+              </a:buClr>
+              <a:buSzPts val="1300"/>
+              <a:buFont typeface="Inter"/>
+              <a:buChar char="●"/>
+            </a:pPr>
+            <a:r>
+              <a:rPr lang="en-US" sz="1300" dirty="0">
+                <a:solidFill>
+                  <a:srgbClr val="434343"/>
+                </a:solidFill>
+                <a:latin typeface="Inter"/>
+                <a:ea typeface="Inter"/>
+                <a:cs typeface="Inter"/>
+                <a:sym typeface="Inter"/>
+              </a:rPr>
+              <a:t>Did you cross review one or more documents?</a:t>
+            </a:r>
+          </a:p>
+        </p:txBody>
+      </p:sp>
     </p:spTree>
     <p:extLst>
       <p:ext uri="{BB962C8B-B14F-4D97-AF65-F5344CB8AC3E}">

--- a/ietf125-Shenzhen/slides/chair-slides-bmwg-ippm.pptx
+++ b/ietf125-Shenzhen/slides/chair-slides-bmwg-ippm.pptx
@@ -322,7 +322,7 @@
 <file path=ppt/revisionInfo.xml><?xml version="1.0" encoding="utf-8"?>
 <p1510:revInfo xmlns:a="http://schemas.openxmlformats.org/drawingml/2006/main" xmlns:r="http://schemas.openxmlformats.org/officeDocument/2006/relationships" xmlns:p1510="http://schemas.microsoft.com/office/powerpoint/2015/10/main">
   <p1510:revLst>
-    <p1510:client id="{BA3A2461-F736-466E-BB25-A64358F1D84B}" v="8" dt="2026-03-16T02:54:35.503"/>
+    <p1510:client id="{BA3A2461-F736-466E-BB25-A64358F1D84B}" v="16" dt="2026-03-17T03:54:52.658"/>
   </p1510:revLst>
 </p1510:revInfo>
 </file>
@@ -471,7 +471,7 @@
   <pc:docChgLst>
     <pc:chgData name="Graf Thomas, SCS-INI-NET-VNC-E2E" userId="487bc3e3-9ce7-4cdd-b7b4-8899ea88d289" providerId="ADAL" clId="{ADEEF08A-D719-4B50-A383-4105EDA2C206}"/>
     <pc:docChg chg="undo custSel addSld delSld modSld sldOrd">
-      <pc:chgData name="Graf Thomas, SCS-INI-NET-VNC-E2E" userId="487bc3e3-9ce7-4cdd-b7b4-8899ea88d289" providerId="ADAL" clId="{ADEEF08A-D719-4B50-A383-4105EDA2C206}" dt="2026-03-16T02:57:23.834" v="822" actId="14100"/>
+      <pc:chgData name="Graf Thomas, SCS-INI-NET-VNC-E2E" userId="487bc3e3-9ce7-4cdd-b7b4-8899ea88d289" providerId="ADAL" clId="{ADEEF08A-D719-4B50-A383-4105EDA2C206}" dt="2026-03-17T03:54:28.756" v="852" actId="6549"/>
       <pc:docMkLst>
         <pc:docMk/>
       </pc:docMkLst>
@@ -521,8 +521,8 @@
           </ac:spMkLst>
         </pc:spChg>
       </pc:sldChg>
-      <pc:sldChg chg="modSp mod">
-        <pc:chgData name="Graf Thomas, SCS-INI-NET-VNC-E2E" userId="487bc3e3-9ce7-4cdd-b7b4-8899ea88d289" providerId="ADAL" clId="{ADEEF08A-D719-4B50-A383-4105EDA2C206}" dt="2026-03-08T10:28:35.394" v="300" actId="20577"/>
+      <pc:sldChg chg="modSp mod modShow">
+        <pc:chgData name="Graf Thomas, SCS-INI-NET-VNC-E2E" userId="487bc3e3-9ce7-4cdd-b7b4-8899ea88d289" providerId="ADAL" clId="{ADEEF08A-D719-4B50-A383-4105EDA2C206}" dt="2026-03-17T03:50:27.260" v="849" actId="729"/>
         <pc:sldMkLst>
           <pc:docMk/>
           <pc:sldMk cId="0" sldId="260"/>
@@ -552,13 +552,21 @@
         </pc:spChg>
       </pc:sldChg>
       <pc:sldChg chg="addSp delSp modSp mod">
-        <pc:chgData name="Graf Thomas, SCS-INI-NET-VNC-E2E" userId="487bc3e3-9ce7-4cdd-b7b4-8899ea88d289" providerId="ADAL" clId="{ADEEF08A-D719-4B50-A383-4105EDA2C206}" dt="2026-03-08T10:30:12.315" v="304" actId="1076"/>
+        <pc:chgData name="Graf Thomas, SCS-INI-NET-VNC-E2E" userId="487bc3e3-9ce7-4cdd-b7b4-8899ea88d289" providerId="ADAL" clId="{ADEEF08A-D719-4B50-A383-4105EDA2C206}" dt="2026-03-17T03:35:05.713" v="827" actId="14100"/>
         <pc:sldMkLst>
           <pc:docMk/>
           <pc:sldMk cId="2332748115" sldId="263"/>
         </pc:sldMkLst>
         <pc:picChg chg="add mod">
-          <ac:chgData name="Graf Thomas, SCS-INI-NET-VNC-E2E" userId="487bc3e3-9ce7-4cdd-b7b4-8899ea88d289" providerId="ADAL" clId="{ADEEF08A-D719-4B50-A383-4105EDA2C206}" dt="2026-03-08T10:30:12.315" v="304" actId="1076"/>
+          <ac:chgData name="Graf Thomas, SCS-INI-NET-VNC-E2E" userId="487bc3e3-9ce7-4cdd-b7b4-8899ea88d289" providerId="ADAL" clId="{ADEEF08A-D719-4B50-A383-4105EDA2C206}" dt="2026-03-17T03:35:05.713" v="827" actId="14100"/>
+          <ac:picMkLst>
+            <pc:docMk/>
+            <pc:sldMk cId="2332748115" sldId="263"/>
+            <ac:picMk id="5" creationId="{7D9875EA-960F-77FB-E964-5AC1532E0964}"/>
+          </ac:picMkLst>
+        </pc:picChg>
+        <pc:picChg chg="add del mod">
+          <ac:chgData name="Graf Thomas, SCS-INI-NET-VNC-E2E" userId="487bc3e3-9ce7-4cdd-b7b4-8899ea88d289" providerId="ADAL" clId="{ADEEF08A-D719-4B50-A383-4105EDA2C206}" dt="2026-03-17T03:34:59.055" v="823" actId="478"/>
           <ac:picMkLst>
             <pc:docMk/>
             <pc:sldMk cId="2332748115" sldId="263"/>
@@ -567,22 +575,30 @@
         </pc:picChg>
       </pc:sldChg>
       <pc:sldChg chg="addSp delSp modSp mod">
-        <pc:chgData name="Graf Thomas, SCS-INI-NET-VNC-E2E" userId="487bc3e3-9ce7-4cdd-b7b4-8899ea88d289" providerId="ADAL" clId="{ADEEF08A-D719-4B50-A383-4105EDA2C206}" dt="2026-03-08T10:30:41.822" v="309" actId="1076"/>
+        <pc:chgData name="Graf Thomas, SCS-INI-NET-VNC-E2E" userId="487bc3e3-9ce7-4cdd-b7b4-8899ea88d289" providerId="ADAL" clId="{ADEEF08A-D719-4B50-A383-4105EDA2C206}" dt="2026-03-17T03:35:31.710" v="832" actId="14100"/>
         <pc:sldMkLst>
           <pc:docMk/>
           <pc:sldMk cId="703495152" sldId="264"/>
         </pc:sldMkLst>
-        <pc:picChg chg="add mod">
-          <ac:chgData name="Graf Thomas, SCS-INI-NET-VNC-E2E" userId="487bc3e3-9ce7-4cdd-b7b4-8899ea88d289" providerId="ADAL" clId="{ADEEF08A-D719-4B50-A383-4105EDA2C206}" dt="2026-03-08T10:30:41.822" v="309" actId="1076"/>
+        <pc:picChg chg="add del mod">
+          <ac:chgData name="Graf Thomas, SCS-INI-NET-VNC-E2E" userId="487bc3e3-9ce7-4cdd-b7b4-8899ea88d289" providerId="ADAL" clId="{ADEEF08A-D719-4B50-A383-4105EDA2C206}" dt="2026-03-17T03:35:22.297" v="828" actId="478"/>
           <ac:picMkLst>
             <pc:docMk/>
             <pc:sldMk cId="703495152" sldId="264"/>
             <ac:picMk id="5" creationId="{2A7C2331-189C-8472-D7A5-7462F6F8EE24}"/>
           </ac:picMkLst>
         </pc:picChg>
+        <pc:picChg chg="add mod">
+          <ac:chgData name="Graf Thomas, SCS-INI-NET-VNC-E2E" userId="487bc3e3-9ce7-4cdd-b7b4-8899ea88d289" providerId="ADAL" clId="{ADEEF08A-D719-4B50-A383-4105EDA2C206}" dt="2026-03-17T03:35:31.710" v="832" actId="14100"/>
+          <ac:picMkLst>
+            <pc:docMk/>
+            <pc:sldMk cId="703495152" sldId="264"/>
+            <ac:picMk id="6" creationId="{6C42BB47-46B8-24B3-E7FC-8D01301DFE79}"/>
+          </ac:picMkLst>
+        </pc:picChg>
       </pc:sldChg>
       <pc:sldChg chg="modSp mod">
-        <pc:chgData name="Graf Thomas, SCS-INI-NET-VNC-E2E" userId="487bc3e3-9ce7-4cdd-b7b4-8899ea88d289" providerId="ADAL" clId="{ADEEF08A-D719-4B50-A383-4105EDA2C206}" dt="2026-03-08T10:28:16.563" v="285" actId="20577"/>
+        <pc:chgData name="Graf Thomas, SCS-INI-NET-VNC-E2E" userId="487bc3e3-9ce7-4cdd-b7b4-8899ea88d289" providerId="ADAL" clId="{ADEEF08A-D719-4B50-A383-4105EDA2C206}" dt="2026-03-17T03:51:31.613" v="851" actId="14100"/>
         <pc:sldMkLst>
           <pc:docMk/>
           <pc:sldMk cId="1372742302" sldId="266"/>
@@ -596,7 +612,7 @@
           </ac:spMkLst>
         </pc:spChg>
         <pc:spChg chg="mod">
-          <ac:chgData name="Graf Thomas, SCS-INI-NET-VNC-E2E" userId="487bc3e3-9ce7-4cdd-b7b4-8899ea88d289" providerId="ADAL" clId="{ADEEF08A-D719-4B50-A383-4105EDA2C206}" dt="2026-03-08T10:28:16.563" v="285" actId="20577"/>
+          <ac:chgData name="Graf Thomas, SCS-INI-NET-VNC-E2E" userId="487bc3e3-9ce7-4cdd-b7b4-8899ea88d289" providerId="ADAL" clId="{ADEEF08A-D719-4B50-A383-4105EDA2C206}" dt="2026-03-17T03:51:31.613" v="851" actId="14100"/>
           <ac:spMkLst>
             <pc:docMk/>
             <pc:sldMk cId="1372742302" sldId="266"/>
@@ -605,7 +621,7 @@
         </pc:spChg>
       </pc:sldChg>
       <pc:sldChg chg="modSp mod">
-        <pc:chgData name="Graf Thomas, SCS-INI-NET-VNC-E2E" userId="487bc3e3-9ce7-4cdd-b7b4-8899ea88d289" providerId="ADAL" clId="{ADEEF08A-D719-4B50-A383-4105EDA2C206}" dt="2026-03-08T10:28:26.255" v="291" actId="20577"/>
+        <pc:chgData name="Graf Thomas, SCS-INI-NET-VNC-E2E" userId="487bc3e3-9ce7-4cdd-b7b4-8899ea88d289" providerId="ADAL" clId="{ADEEF08A-D719-4B50-A383-4105EDA2C206}" dt="2026-03-17T03:54:28.756" v="852" actId="6549"/>
         <pc:sldMkLst>
           <pc:docMk/>
           <pc:sldMk cId="2128497270" sldId="269"/>
@@ -619,7 +635,7 @@
           </ac:spMkLst>
         </pc:spChg>
         <pc:spChg chg="mod">
-          <ac:chgData name="Graf Thomas, SCS-INI-NET-VNC-E2E" userId="487bc3e3-9ce7-4cdd-b7b4-8899ea88d289" providerId="ADAL" clId="{ADEEF08A-D719-4B50-A383-4105EDA2C206}" dt="2026-03-08T10:28:26.255" v="291" actId="20577"/>
+          <ac:chgData name="Graf Thomas, SCS-INI-NET-VNC-E2E" userId="487bc3e3-9ce7-4cdd-b7b4-8899ea88d289" providerId="ADAL" clId="{ADEEF08A-D719-4B50-A383-4105EDA2C206}" dt="2026-03-17T03:54:28.756" v="852" actId="6549"/>
           <ac:spMkLst>
             <pc:docMk/>
             <pc:sldMk cId="2128497270" sldId="269"/>
@@ -29731,10 +29747,10 @@
       </p:sp>
       <p:pic>
         <p:nvPicPr>
-          <p:cNvPr id="5" name="Picture 4">
+          <p:cNvPr id="6" name="Picture 5">
             <a:extLst>
               <a:ext uri="{FF2B5EF4-FFF2-40B4-BE49-F238E27FC236}">
-                <a16:creationId xmlns:a16="http://schemas.microsoft.com/office/drawing/2014/main" id="{2A7C2331-189C-8472-D7A5-7462F6F8EE24}"/>
+                <a16:creationId xmlns:a16="http://schemas.microsoft.com/office/drawing/2014/main" id="{6C42BB47-46B8-24B3-E7FC-8D01301DFE79}"/>
               </a:ext>
             </a:extLst>
           </p:cNvPr>
@@ -29751,8 +29767,8 @@
         </p:blipFill>
         <p:spPr>
           <a:xfrm>
-            <a:off x="471900" y="2099886"/>
-            <a:ext cx="6383106" cy="2432016"/>
+            <a:off x="471900" y="1882967"/>
+            <a:ext cx="6022941" cy="2959489"/>
           </a:xfrm>
           <a:prstGeom prst="rect">
             <a:avLst/>
@@ -30634,13 +30650,18 @@
         <p:spPr>
           <a:xfrm>
             <a:off x="471900" y="1919074"/>
-            <a:ext cx="8222100" cy="2710201"/>
+            <a:ext cx="8395008" cy="2710201"/>
           </a:xfrm>
         </p:spPr>
         <p:txBody>
           <a:bodyPr/>
           <a:lstStyle/>
           <a:p>
+            <a:pPr>
+              <a:spcBef>
+                <a:spcPts val="1200"/>
+              </a:spcBef>
+            </a:pPr>
             <a:r>
               <a:rPr lang="de-CH" sz="1400" b="1" dirty="0">
                 <a:hlinkClick r:id="rId3"/>
@@ -30658,6 +30679,11 @@
             <a:endParaRPr lang="de-CH" sz="1200" dirty="0"/>
           </a:p>
           <a:p>
+            <a:pPr>
+              <a:spcBef>
+                <a:spcPts val="1200"/>
+              </a:spcBef>
+            </a:pPr>
             <a:r>
               <a:rPr lang="de-CH" sz="1400" b="1" dirty="0">
                 <a:hlinkClick r:id="rId4"/>
@@ -30670,13 +30696,22 @@
             </a:r>
           </a:p>
           <a:p>
-            <a:pPr lvl="1"/>
+            <a:pPr lvl="1">
+              <a:spcBef>
+                <a:spcPts val="1200"/>
+              </a:spcBef>
+            </a:pPr>
             <a:r>
               <a:rPr lang="de-CH" sz="1200" dirty="0"/>
               <a:t>New revision in preparation to address the Yangdoctors review</a:t>
             </a:r>
           </a:p>
           <a:p>
+            <a:pPr>
+              <a:spcBef>
+                <a:spcPts val="1200"/>
+              </a:spcBef>
+            </a:pPr>
             <a:r>
               <a:rPr lang="de-CH" sz="1400" b="1" dirty="0">
                 <a:hlinkClick r:id="rId5"/>
@@ -30689,6 +30724,11 @@
             </a:r>
           </a:p>
           <a:p>
+            <a:pPr>
+              <a:spcBef>
+                <a:spcPts val="1200"/>
+              </a:spcBef>
+            </a:pPr>
             <a:r>
               <a:rPr lang="de-CH" sz="1400" b="1" dirty="0">
                 <a:hlinkClick r:id="rId6"/>
@@ -30711,12 +30751,22 @@
             </a:r>
           </a:p>
           <a:p>
+            <a:pPr>
+              <a:spcBef>
+                <a:spcPts val="1200"/>
+              </a:spcBef>
+            </a:pPr>
             <a:r>
               <a:rPr lang="de-CH" sz="1400" dirty="0"/>
               <a:t>To resume the discussion for revisiting BMWG RFCs in order to update RFC 2544</a:t>
             </a:r>
           </a:p>
           <a:p>
+            <a:pPr>
+              <a:spcBef>
+                <a:spcPts val="1200"/>
+              </a:spcBef>
+            </a:pPr>
             <a:r>
               <a:rPr lang="en-US" sz="1400" dirty="0"/>
               <a:t>Rechartering to include new work on AI (either for a joint future with IPPM or separately)</a:t>
@@ -31061,8 +31111,163 @@
               </a:spcBef>
             </a:pPr>
             <a:r>
-              <a:rPr lang="en-US" sz="1500" b="1" dirty="0"/>
-              <a:t>TBD</a:t>
+              <a:rPr lang="en-US" sz="1400" dirty="0">
+                <a:hlinkClick r:id="rId3"/>
+              </a:rPr>
+              <a:t>draft-</a:t>
+            </a:r>
+            <a:r>
+              <a:rPr lang="en-US" sz="1400" dirty="0" err="1">
+                <a:hlinkClick r:id="rId3"/>
+              </a:rPr>
+              <a:t>ietf</a:t>
+            </a:r>
+            <a:r>
+              <a:rPr lang="en-US" sz="1400" dirty="0">
+                <a:hlinkClick r:id="rId3"/>
+              </a:rPr>
+              <a:t>-ippm-asymmetrical-pkts</a:t>
+            </a:r>
+            <a:r>
+              <a:rPr lang="en-US" sz="1400" dirty="0"/>
+              <a:t> received IESG comments which were addressed in -13.</a:t>
+            </a:r>
+          </a:p>
+          <a:p>
+            <a:pPr>
+              <a:spcBef>
+                <a:spcPts val="1200"/>
+              </a:spcBef>
+            </a:pPr>
+            <a:r>
+              <a:rPr lang="en-US" sz="1400" dirty="0">
+                <a:hlinkClick r:id="rId4"/>
+              </a:rPr>
+              <a:t>draft-ietf-ippm-qoo-07</a:t>
+            </a:r>
+            <a:r>
+              <a:rPr lang="en-US" sz="1400" dirty="0"/>
+              <a:t> received reviews from TSVART, ARTART, SECDIR and GENART. Authors are currently working on addressing the comments.</a:t>
+            </a:r>
+          </a:p>
+          <a:p>
+            <a:pPr>
+              <a:spcBef>
+                <a:spcPts val="1200"/>
+              </a:spcBef>
+            </a:pPr>
+            <a:r>
+              <a:rPr lang="en-US" sz="1400" dirty="0">
+                <a:hlinkClick r:id="rId5"/>
+              </a:rPr>
+              <a:t>draft-ietf-ippm-ioam-integrity-yang-05</a:t>
+            </a:r>
+            <a:r>
+              <a:rPr lang="en-US" sz="1400" dirty="0"/>
+              <a:t> working group last call </a:t>
+            </a:r>
+            <a:r>
+              <a:rPr lang="en-US" sz="1400" dirty="0">
+                <a:hlinkClick r:id="rId6"/>
+              </a:rPr>
+              <a:t>currently running</a:t>
+            </a:r>
+            <a:r>
+              <a:rPr lang="en-US" sz="1400" dirty="0"/>
+              <a:t>. </a:t>
+            </a:r>
+            <a:r>
+              <a:rPr lang="en-US" sz="1400" b="1" dirty="0"/>
+              <a:t>We need more feedback from both working groups </a:t>
+            </a:r>
+            <a:r>
+              <a:rPr lang="en-US" sz="1400" dirty="0"/>
+              <a:t>and want to progress </a:t>
+            </a:r>
+            <a:r>
+              <a:rPr lang="en-US" sz="1400" dirty="0">
+                <a:hlinkClick r:id="rId7"/>
+              </a:rPr>
+              <a:t>draft-</a:t>
+            </a:r>
+            <a:r>
+              <a:rPr lang="en-US" sz="1400" dirty="0" err="1">
+                <a:hlinkClick r:id="rId7"/>
+              </a:rPr>
+              <a:t>ietf</a:t>
+            </a:r>
+            <a:r>
+              <a:rPr lang="en-US" sz="1400" dirty="0">
+                <a:hlinkClick r:id="rId7"/>
+              </a:rPr>
+              <a:t>-ippm-</a:t>
+            </a:r>
+            <a:r>
+              <a:rPr lang="en-US" sz="1400" dirty="0" err="1">
+                <a:hlinkClick r:id="rId7"/>
+              </a:rPr>
+              <a:t>ioam</a:t>
+            </a:r>
+            <a:r>
+              <a:rPr lang="en-US" sz="1400" dirty="0">
+                <a:hlinkClick r:id="rId7"/>
+              </a:rPr>
+              <a:t>-data-integrity</a:t>
+            </a:r>
+            <a:r>
+              <a:rPr lang="en-US" sz="1400" dirty="0"/>
+              <a:t> and </a:t>
+            </a:r>
+            <a:r>
+              <a:rPr lang="en-US" sz="1400" dirty="0">
+                <a:hlinkClick r:id="rId8"/>
+              </a:rPr>
+              <a:t>draft-</a:t>
+            </a:r>
+            <a:r>
+              <a:rPr lang="en-US" sz="1400" dirty="0" err="1">
+                <a:hlinkClick r:id="rId8"/>
+              </a:rPr>
+              <a:t>ietf</a:t>
+            </a:r>
+            <a:r>
+              <a:rPr lang="en-US" sz="1400" dirty="0">
+                <a:hlinkClick r:id="rId8"/>
+              </a:rPr>
+              <a:t>-ippm-</a:t>
+            </a:r>
+            <a:r>
+              <a:rPr lang="en-US" sz="1400" dirty="0" err="1">
+                <a:hlinkClick r:id="rId8"/>
+              </a:rPr>
+              <a:t>ioam</a:t>
+            </a:r>
+            <a:r>
+              <a:rPr lang="en-US" sz="1400" dirty="0">
+                <a:hlinkClick r:id="rId8"/>
+              </a:rPr>
+              <a:t>-integrity-yang</a:t>
+            </a:r>
+            <a:r>
+              <a:rPr lang="en-US" sz="1400" dirty="0"/>
+              <a:t> at the same time through IESG.</a:t>
+            </a:r>
+          </a:p>
+          <a:p>
+            <a:pPr>
+              <a:spcBef>
+                <a:spcPts val="1200"/>
+              </a:spcBef>
+            </a:pPr>
+            <a:r>
+              <a:rPr lang="en-US" sz="1400" dirty="0">
+                <a:hlinkClick r:id="rId9"/>
+              </a:rPr>
+              <a:t>draft-ietf-ippm-encrypted-pdmv2</a:t>
+            </a:r>
+            <a:r>
+              <a:rPr lang="en-US" sz="1400" dirty="0"/>
+              <a:t> authors published -13 and intend to reach-out to the TSVART and GENART reviewers to clarify wherever the document update addressed their comments and request feedback from IPPM/BMWG/6MAN.</a:t>
             </a:r>
             <a:endParaRPr lang="en-US" dirty="0"/>
           </a:p>
@@ -31082,7 +31287,7 @@
 </file>
 
 <file path=ppt/slides/slide16.xml><?xml version="1.0" encoding="utf-8"?>
-<p:sld xmlns:a="http://schemas.openxmlformats.org/drawingml/2006/main" xmlns:r="http://schemas.openxmlformats.org/officeDocument/2006/relationships" xmlns:p="http://schemas.openxmlformats.org/presentationml/2006/main" show="0">
+<p:sld xmlns:a="http://schemas.openxmlformats.org/drawingml/2006/main" xmlns:r="http://schemas.openxmlformats.org/officeDocument/2006/relationships" xmlns:p="http://schemas.openxmlformats.org/presentationml/2006/main">
   <p:cSld>
     <p:spTree>
       <p:nvGrpSpPr>
@@ -34337,10 +34542,10 @@
       </p:sp>
       <p:pic>
         <p:nvPicPr>
-          <p:cNvPr id="6" name="Picture 5">
+          <p:cNvPr id="5" name="Picture 4">
             <a:extLst>
               <a:ext uri="{FF2B5EF4-FFF2-40B4-BE49-F238E27FC236}">
-                <a16:creationId xmlns:a16="http://schemas.microsoft.com/office/drawing/2014/main" id="{1BE5F7A4-628B-DDA9-A72D-3012CFAB2A25}"/>
+                <a16:creationId xmlns:a16="http://schemas.microsoft.com/office/drawing/2014/main" id="{7D9875EA-960F-77FB-E964-5AC1532E0964}"/>
               </a:ext>
             </a:extLst>
           </p:cNvPr>
@@ -34357,8 +34562,8 @@
         </p:blipFill>
         <p:spPr>
           <a:xfrm>
-            <a:off x="471900" y="1875974"/>
-            <a:ext cx="5273328" cy="2965863"/>
+            <a:off x="471901" y="1793818"/>
+            <a:ext cx="4808438" cy="3142915"/>
           </a:xfrm>
           <a:prstGeom prst="rect">
             <a:avLst/>
@@ -35802,16 +36007,16 @@
 <file path=customXml/itemProps3.xml><?xml version="1.0" encoding="utf-8"?>
 <ds:datastoreItem xmlns:ds="http://schemas.openxmlformats.org/officeDocument/2006/customXml" ds:itemID="{3D7021EF-4D3D-4708-92FB-F2CD02CEF7A1}">
   <ds:schemaRefs>
-    <ds:schemaRef ds:uri="http://schemas.openxmlformats.org/package/2006/metadata/core-properties"/>
-    <ds:schemaRef ds:uri="http://schemas.microsoft.com/office/2006/documentManagement/types"/>
-    <ds:schemaRef ds:uri="http://schemas.microsoft.com/office/infopath/2007/PartnerControls"/>
     <ds:schemaRef ds:uri="http://purl.org/dc/elements/1.1/"/>
-    <ds:schemaRef ds:uri="http://schemas.microsoft.com/office/2006/metadata/properties"/>
     <ds:schemaRef ds:uri="3e5e162a-5953-4fde-83b3-9639e6ab13bb"/>
     <ds:schemaRef ds:uri="266fa233-377d-43d6-82a1-e70154e55ff7"/>
     <ds:schemaRef ds:uri="http://purl.org/dc/terms/"/>
+    <ds:schemaRef ds:uri="http://purl.org/dc/dcmitype/"/>
+    <ds:schemaRef ds:uri="http://schemas.microsoft.com/office/infopath/2007/PartnerControls"/>
+    <ds:schemaRef ds:uri="http://schemas.microsoft.com/office/2006/documentManagement/types"/>
+    <ds:schemaRef ds:uri="http://schemas.openxmlformats.org/package/2006/metadata/core-properties"/>
+    <ds:schemaRef ds:uri="http://schemas.microsoft.com/office/2006/metadata/properties"/>
     <ds:schemaRef ds:uri="http://www.w3.org/XML/1998/namespace"/>
-    <ds:schemaRef ds:uri="http://purl.org/dc/dcmitype/"/>
   </ds:schemaRefs>
 </ds:datastoreItem>
 </file>
